--- a/presentation-project/11_premium-deck-test/presentation.pptx
+++ b/presentation-project/11_premium-deck-test/presentation.pptx
@@ -3560,6 +3560,7 @@
         </p:nvPicPr>
         <p:blipFill>
           <a:blip r:embed="rId2"/>
+          <a:srcRect/>
           <a:stretch>
             <a:fillRect/>
           </a:stretch>
@@ -3590,29 +3591,29 @@
             <a:gdLst/>
             <a:ahLst/>
             <a:cxnLst/>
-            <a:rect l="l" t="t" r="r" b="b"/>
+            <a:rect l="0" t="0" r="r" b="b"/>
             <a:pathLst>
               <a:path w="1023833" h="1050994">
                 <a:moveTo>
                   <a:pt x="1023833" y="1050994"/>
                 </a:moveTo>
                 <a:lnTo>
-                  <a:pt x="1003969" y="1039641"/>
+                  <a:pt x="1003970" y="1039641"/>
                 </a:lnTo>
                 <a:lnTo>
                   <a:pt x="984206" y="1028115"/>
                 </a:lnTo>
                 <a:lnTo>
-                  <a:pt x="964544" y="1016418"/>
+                  <a:pt x="964545" y="1016418"/>
                 </a:lnTo>
                 <a:lnTo>
                   <a:pt x="944985" y="1004549"/>
                 </a:lnTo>
                 <a:lnTo>
-                  <a:pt x="925530" y="992510"/>
-                </a:lnTo>
-                <a:lnTo>
-                  <a:pt x="906181" y="980302"/>
+                  <a:pt x="925531" y="992510"/>
+                </a:lnTo>
+                <a:lnTo>
+                  <a:pt x="906182" y="980302"/>
                 </a:lnTo>
                 <a:lnTo>
                   <a:pt x="886940" y="967925"/>
@@ -3630,7 +3631,7 @@
                   <a:pt x="811075" y="916754"/>
                 </a:lnTo>
                 <a:lnTo>
-                  <a:pt x="792391" y="903549"/>
+                  <a:pt x="792392" y="903549"/>
                 </a:lnTo>
                 <a:lnTo>
                   <a:pt x="773824" y="890183"/>
@@ -3663,7 +3664,7 @@
                   <a:pt x="612163" y="762740"/>
                 </a:lnTo>
                 <a:lnTo>
-                  <a:pt x="594831" y="747805"/>
+                  <a:pt x="594831" y="747806"/>
                 </a:lnTo>
                 <a:lnTo>
                   <a:pt x="577630" y="732721"/>
@@ -3672,7 +3673,7 @@
                   <a:pt x="560562" y="717486"/>
                 </a:lnTo>
                 <a:lnTo>
-                  <a:pt x="543626" y="702104"/>
+                  <a:pt x="543627" y="702104"/>
                 </a:lnTo>
                 <a:lnTo>
                   <a:pt x="526826" y="686574"/>
@@ -3684,7 +3685,7 @@
                   <a:pt x="493636" y="655077"/>
                 </a:lnTo>
                 <a:lnTo>
-                  <a:pt x="477248" y="639112"/>
+                  <a:pt x="477248" y="639113"/>
                 </a:lnTo>
                 <a:lnTo>
                   <a:pt x="461000" y="623006"/>
@@ -3756,19 +3757,19 @@
                   <a:pt x="141335" y="235221"/>
                 </a:lnTo>
                 <a:lnTo>
-                  <a:pt x="128624" y="216199"/>
-                </a:lnTo>
-                <a:lnTo>
-                  <a:pt x="116080" y="197066"/>
+                  <a:pt x="128625" y="216199"/>
+                </a:lnTo>
+                <a:lnTo>
+                  <a:pt x="116081" y="197066"/>
                 </a:lnTo>
                 <a:lnTo>
                   <a:pt x="103704" y="177824"/>
                 </a:lnTo>
                 <a:lnTo>
-                  <a:pt x="91495" y="158475"/>
-                </a:lnTo>
-                <a:lnTo>
-                  <a:pt x="79456" y="139020"/>
+                  <a:pt x="91496" y="158475"/>
+                </a:lnTo>
+                <a:lnTo>
+                  <a:pt x="79457" y="139020"/>
                 </a:lnTo>
                 <a:lnTo>
                   <a:pt x="67588" y="119461"/>
@@ -3777,7 +3778,7 @@
                   <a:pt x="55890" y="99799"/>
                 </a:lnTo>
                 <a:lnTo>
-                  <a:pt x="44364" y="80036"/>
+                  <a:pt x="44365" y="80036"/>
                 </a:lnTo>
                 <a:lnTo>
                   <a:pt x="33012" y="60173"/>
@@ -5456,6 +5457,7 @@
         </p:nvPicPr>
         <p:blipFill>
           <a:blip r:embed="rId2"/>
+          <a:srcRect/>
           <a:stretch>
             <a:fillRect/>
           </a:stretch>
@@ -5480,6 +5482,7 @@
         </p:nvPicPr>
         <p:blipFill>
           <a:blip r:embed="rId3"/>
+          <a:srcRect/>
           <a:stretch>
             <a:fillRect/>
           </a:stretch>
@@ -5504,6 +5507,7 @@
         </p:nvPicPr>
         <p:blipFill>
           <a:blip r:embed="rId4"/>
+          <a:srcRect/>
           <a:stretch>
             <a:fillRect/>
           </a:stretch>
@@ -5771,26 +5775,26 @@
             <a:gdLst/>
             <a:ahLst/>
             <a:cxnLst/>
-            <a:rect l="l" t="t" r="r" b="b"/>
+            <a:rect l="0" t="0" r="r" b="b"/>
             <a:pathLst>
               <a:path w="1944555" h="1631676">
                 <a:moveTo>
                   <a:pt x="0" y="1631676"/>
                 </a:moveTo>
                 <a:lnTo>
-                  <a:pt x="9630" y="1609260"/>
+                  <a:pt x="9631" y="1609260"/>
                 </a:lnTo>
                 <a:lnTo>
                   <a:pt x="19456" y="1586929"/>
                 </a:lnTo>
                 <a:lnTo>
-                  <a:pt x="29476" y="1564685"/>
-                </a:lnTo>
-                <a:lnTo>
-                  <a:pt x="39690" y="1542529"/>
-                </a:lnTo>
-                <a:lnTo>
-                  <a:pt x="50097" y="1520463"/>
+                  <a:pt x="29477" y="1564685"/>
+                </a:lnTo>
+                <a:lnTo>
+                  <a:pt x="39691" y="1542529"/>
+                </a:lnTo>
+                <a:lnTo>
+                  <a:pt x="50098" y="1520463"/>
                 </a:lnTo>
                 <a:lnTo>
                   <a:pt x="60697" y="1498489"/>
@@ -5805,22 +5809,22 @@
                   <a:pt x="93639" y="1433133"/>
                 </a:lnTo>
                 <a:lnTo>
-                  <a:pt x="104998" y="1411542"/>
-                </a:lnTo>
-                <a:lnTo>
-                  <a:pt x="116546" y="1390051"/>
+                  <a:pt x="104999" y="1411542"/>
+                </a:lnTo>
+                <a:lnTo>
+                  <a:pt x="116546" y="1390050"/>
                 </a:lnTo>
                 <a:lnTo>
                   <a:pt x="128281" y="1368661"/>
                 </a:lnTo>
                 <a:lnTo>
-                  <a:pt x="140201" y="1347375"/>
-                </a:lnTo>
-                <a:lnTo>
-                  <a:pt x="152308" y="1326194"/>
-                </a:lnTo>
-                <a:lnTo>
-                  <a:pt x="164598" y="1305119"/>
+                  <a:pt x="140202" y="1347375"/>
+                </a:lnTo>
+                <a:lnTo>
+                  <a:pt x="152308" y="1326193"/>
+                </a:lnTo>
+                <a:lnTo>
+                  <a:pt x="164598" y="1305118"/>
                 </a:lnTo>
                 <a:lnTo>
                   <a:pt x="177072" y="1284152"/>
@@ -5835,10 +5839,10 @@
                   <a:pt x="215585" y="1221915"/>
                 </a:lnTo>
                 <a:lnTo>
-                  <a:pt x="228783" y="1201397"/>
-                </a:lnTo>
-                <a:lnTo>
-                  <a:pt x="242160" y="1180994"/>
+                  <a:pt x="228784" y="1201396"/>
+                </a:lnTo>
+                <a:lnTo>
+                  <a:pt x="242160" y="1180993"/>
                 </a:lnTo>
                 <a:lnTo>
                   <a:pt x="255714" y="1160708"/>
@@ -5862,25 +5866,25 @@
                   <a:pt x="340709" y="1041550"/>
                 </a:lnTo>
                 <a:lnTo>
-                  <a:pt x="355476" y="1022130"/>
-                </a:lnTo>
-                <a:lnTo>
-                  <a:pt x="370413" y="1002840"/>
+                  <a:pt x="355477" y="1022130"/>
+                </a:lnTo>
+                <a:lnTo>
+                  <a:pt x="370413" y="1002839"/>
                 </a:lnTo>
                 <a:lnTo>
                   <a:pt x="385517" y="983680"/>
                 </a:lnTo>
                 <a:lnTo>
-                  <a:pt x="400787" y="964653"/>
-                </a:lnTo>
-                <a:lnTo>
-                  <a:pt x="416223" y="945761"/>
+                  <a:pt x="400788" y="964653"/>
+                </a:lnTo>
+                <a:lnTo>
+                  <a:pt x="416224" y="945760"/>
                 </a:lnTo>
                 <a:lnTo>
                   <a:pt x="431824" y="927003"/>
                 </a:lnTo>
                 <a:lnTo>
-                  <a:pt x="447587" y="908383"/>
+                  <a:pt x="447587" y="908382"/>
                 </a:lnTo>
                 <a:lnTo>
                   <a:pt x="463513" y="889900"/>
@@ -5895,7 +5899,7 @@
                   <a:pt x="512248" y="835297"/>
                 </a:lnTo>
                 <a:lnTo>
-                  <a:pt x="528808" y="817382"/>
+                  <a:pt x="528809" y="817382"/>
                 </a:lnTo>
                 <a:lnTo>
                   <a:pt x="545525" y="799612"/>
@@ -5907,19 +5911,19 @@
                   <a:pt x="579420" y="764513"/>
                 </a:lnTo>
                 <a:lnTo>
-                  <a:pt x="596595" y="747186"/>
-                </a:lnTo>
-                <a:lnTo>
-                  <a:pt x="613922" y="730011"/>
-                </a:lnTo>
-                <a:lnTo>
-                  <a:pt x="631397" y="712987"/>
+                  <a:pt x="596596" y="747186"/>
+                </a:lnTo>
+                <a:lnTo>
+                  <a:pt x="613922" y="730010"/>
+                </a:lnTo>
+                <a:lnTo>
+                  <a:pt x="631398" y="712986"/>
                 </a:lnTo>
                 <a:lnTo>
                   <a:pt x="649021" y="696116"/>
                 </a:lnTo>
                 <a:lnTo>
-                  <a:pt x="666791" y="679400"/>
+                  <a:pt x="666791" y="679399"/>
                 </a:lnTo>
                 <a:lnTo>
                   <a:pt x="684706" y="662839"/>
@@ -5928,10 +5932,10 @@
                   <a:pt x="702765" y="646435"/>
                 </a:lnTo>
                 <a:lnTo>
-                  <a:pt x="720967" y="630190"/>
-                </a:lnTo>
-                <a:lnTo>
-                  <a:pt x="739309" y="614104"/>
+                  <a:pt x="720967" y="630189"/>
+                </a:lnTo>
+                <a:lnTo>
+                  <a:pt x="739310" y="614103"/>
                 </a:lnTo>
                 <a:lnTo>
                   <a:pt x="757792" y="598178"/>
@@ -5943,7 +5947,7 @@
                   <a:pt x="795170" y="566814"/>
                 </a:lnTo>
                 <a:lnTo>
-                  <a:pt x="814062" y="551378"/>
+                  <a:pt x="814063" y="551378"/>
                 </a:lnTo>
                 <a:lnTo>
                   <a:pt x="833089" y="536108"/>
@@ -5952,7 +5956,7 @@
                   <a:pt x="852249" y="521004"/>
                 </a:lnTo>
                 <a:lnTo>
-                  <a:pt x="871539" y="506068"/>
+                  <a:pt x="871539" y="506067"/>
                 </a:lnTo>
                 <a:lnTo>
                   <a:pt x="890959" y="491300"/>
@@ -5967,28 +5971,28 @@
                   <a:pt x="949982" y="448023"/>
                 </a:lnTo>
                 <a:lnTo>
-                  <a:pt x="969905" y="433942"/>
+                  <a:pt x="969906" y="433942"/>
                 </a:lnTo>
                 <a:lnTo>
                   <a:pt x="989951" y="420036"/>
                 </a:lnTo>
                 <a:lnTo>
-                  <a:pt x="1010117" y="406305"/>
+                  <a:pt x="1010118" y="406305"/>
                 </a:lnTo>
                 <a:lnTo>
                   <a:pt x="1030403" y="392751"/>
                 </a:lnTo>
                 <a:lnTo>
-                  <a:pt x="1050805" y="379374"/>
+                  <a:pt x="1050806" y="379374"/>
                 </a:lnTo>
                 <a:lnTo>
                   <a:pt x="1071324" y="366176"/>
                 </a:lnTo>
                 <a:lnTo>
-                  <a:pt x="1091957" y="353158"/>
-                </a:lnTo>
-                <a:lnTo>
-                  <a:pt x="1112703" y="340320"/>
+                  <a:pt x="1091958" y="353158"/>
+                </a:lnTo>
+                <a:lnTo>
+                  <a:pt x="1112704" y="340320"/>
                 </a:lnTo>
                 <a:lnTo>
                   <a:pt x="1133561" y="327663"/>
@@ -5997,13 +6001,13 @@
                   <a:pt x="1154528" y="315189"/>
                 </a:lnTo>
                 <a:lnTo>
-                  <a:pt x="1175603" y="302899"/>
-                </a:lnTo>
-                <a:lnTo>
-                  <a:pt x="1196784" y="290793"/>
-                </a:lnTo>
-                <a:lnTo>
-                  <a:pt x="1218070" y="278872"/>
+                  <a:pt x="1175603" y="302898"/>
+                </a:lnTo>
+                <a:lnTo>
+                  <a:pt x="1196784" y="290792"/>
+                </a:lnTo>
+                <a:lnTo>
+                  <a:pt x="1218070" y="278871"/>
                 </a:lnTo>
                 <a:lnTo>
                   <a:pt x="1239460" y="267137"/>
@@ -6021,7 +6025,7 @@
                   <a:pt x="1326017" y="222078"/>
                 </a:lnTo>
                 <a:lnTo>
-                  <a:pt x="1347898" y="211288"/>
+                  <a:pt x="1347898" y="211287"/>
                 </a:lnTo>
                 <a:lnTo>
                   <a:pt x="1369872" y="200688"/>
@@ -6033,7 +6037,7 @@
                   <a:pt x="1414094" y="180067"/>
                 </a:lnTo>
                 <a:lnTo>
-                  <a:pt x="1436338" y="170047"/>
+                  <a:pt x="1436339" y="170047"/>
                 </a:lnTo>
                 <a:lnTo>
                   <a:pt x="1458669" y="160221"/>
@@ -6051,7 +6055,7 @@
                   <a:pt x="1548824" y="122878"/>
                 </a:lnTo>
                 <a:lnTo>
-                  <a:pt x="1571562" y="114036"/>
+                  <a:pt x="1571563" y="114035"/>
                 </a:lnTo>
                 <a:lnTo>
                   <a:pt x="1594377" y="105392"/>
@@ -6060,7 +6064,7 @@
                   <a:pt x="1617266" y="96948"/>
                 </a:lnTo>
                 <a:lnTo>
-                  <a:pt x="1640228" y="88704"/>
+                  <a:pt x="1640228" y="88703"/>
                 </a:lnTo>
                 <a:lnTo>
                   <a:pt x="1663261" y="80660"/>
@@ -6078,7 +6082,7 @@
                   <a:pt x="1756068" y="50505"/>
                 </a:lnTo>
                 <a:lnTo>
-                  <a:pt x="1779429" y="43474"/>
+                  <a:pt x="1779430" y="43474"/>
                 </a:lnTo>
                 <a:lnTo>
                   <a:pt x="1802852" y="36647"/>
@@ -6553,102 +6557,102 @@
         <p:spPr>
           <a:xfrm>
             <a:off x="5491099" y="897688"/>
-            <a:ext cx="6681893" cy="5913882"/>
+            <a:ext cx="6681893" cy="5913881"/>
           </a:xfrm>
           <a:custGeom>
             <a:avLst/>
             <a:gdLst/>
             <a:ahLst/>
             <a:cxnLst/>
-            <a:rect l="l" t="t" r="r" b="b"/>
+            <a:rect l="0" t="0" r="r" b="b"/>
             <a:pathLst>
-              <a:path w="6681893" h="5913882">
+              <a:path w="6681893" h="5913881">
                 <a:moveTo>
-                  <a:pt x="0" y="5913882"/>
+                  <a:pt x="0" y="5913881"/>
                 </a:moveTo>
                 <a:lnTo>
-                  <a:pt x="5718" y="5857090"/>
-                </a:lnTo>
-                <a:lnTo>
-                  <a:pt x="11932" y="5800350"/>
-                </a:lnTo>
-                <a:lnTo>
-                  <a:pt x="18641" y="5743667"/>
-                </a:lnTo>
-                <a:lnTo>
-                  <a:pt x="25844" y="5687044"/>
-                </a:lnTo>
-                <a:lnTo>
-                  <a:pt x="33542" y="5630487"/>
+                  <a:pt x="5719" y="5857089"/>
+                </a:lnTo>
+                <a:lnTo>
+                  <a:pt x="11933" y="5800350"/>
+                </a:lnTo>
+                <a:lnTo>
+                  <a:pt x="18642" y="5743666"/>
+                </a:lnTo>
+                <a:lnTo>
+                  <a:pt x="25845" y="5687044"/>
+                </a:lnTo>
+                <a:lnTo>
+                  <a:pt x="33542" y="5630486"/>
                 </a:lnTo>
                 <a:lnTo>
                   <a:pt x="41732" y="5573998"/>
                 </a:lnTo>
                 <a:lnTo>
-                  <a:pt x="50415" y="5517584"/>
+                  <a:pt x="50415" y="5517583"/>
                 </a:lnTo>
                 <a:lnTo>
                   <a:pt x="59590" y="5461247"/>
                 </a:lnTo>
                 <a:lnTo>
-                  <a:pt x="69256" y="5404993"/>
-                </a:lnTo>
-                <a:lnTo>
-                  <a:pt x="79413" y="5348824"/>
+                  <a:pt x="69257" y="5404992"/>
+                </a:lnTo>
+                <a:lnTo>
+                  <a:pt x="79414" y="5348824"/>
                 </a:lnTo>
                 <a:lnTo>
                   <a:pt x="90060" y="5292747"/>
                 </a:lnTo>
                 <a:lnTo>
-                  <a:pt x="101195" y="5236765"/>
+                  <a:pt x="101196" y="5236765"/>
                 </a:lnTo>
                 <a:lnTo>
                   <a:pt x="112819" y="5180882"/>
                 </a:lnTo>
                 <a:lnTo>
-                  <a:pt x="124930" y="5125103"/>
+                  <a:pt x="124930" y="5125102"/>
                 </a:lnTo>
                 <a:lnTo>
                   <a:pt x="137527" y="5069431"/>
                 </a:lnTo>
                 <a:lnTo>
-                  <a:pt x="150610" y="5013872"/>
-                </a:lnTo>
-                <a:lnTo>
-                  <a:pt x="164176" y="4958429"/>
-                </a:lnTo>
-                <a:lnTo>
-                  <a:pt x="178227" y="4903106"/>
-                </a:lnTo>
-                <a:lnTo>
-                  <a:pt x="192759" y="4847908"/>
-                </a:lnTo>
-                <a:lnTo>
-                  <a:pt x="207773" y="4792839"/>
-                </a:lnTo>
-                <a:lnTo>
-                  <a:pt x="223266" y="4737903"/>
-                </a:lnTo>
-                <a:lnTo>
-                  <a:pt x="239238" y="4683104"/>
-                </a:lnTo>
-                <a:lnTo>
-                  <a:pt x="255688" y="4628447"/>
-                </a:lnTo>
-                <a:lnTo>
-                  <a:pt x="272615" y="4573936"/>
-                </a:lnTo>
-                <a:lnTo>
-                  <a:pt x="290016" y="4519574"/>
-                </a:lnTo>
-                <a:lnTo>
-                  <a:pt x="307891" y="4465366"/>
-                </a:lnTo>
-                <a:lnTo>
-                  <a:pt x="326238" y="4411316"/>
-                </a:lnTo>
-                <a:lnTo>
-                  <a:pt x="345057" y="4357429"/>
+                  <a:pt x="150610" y="5013871"/>
+                </a:lnTo>
+                <a:lnTo>
+                  <a:pt x="164177" y="4958428"/>
+                </a:lnTo>
+                <a:lnTo>
+                  <a:pt x="178227" y="4903105"/>
+                </a:lnTo>
+                <a:lnTo>
+                  <a:pt x="192759" y="4847907"/>
+                </a:lnTo>
+                <a:lnTo>
+                  <a:pt x="207773" y="4792838"/>
+                </a:lnTo>
+                <a:lnTo>
+                  <a:pt x="223267" y="4737902"/>
+                </a:lnTo>
+                <a:lnTo>
+                  <a:pt x="239239" y="4683104"/>
+                </a:lnTo>
+                <a:lnTo>
+                  <a:pt x="255689" y="4628447"/>
+                </a:lnTo>
+                <a:lnTo>
+                  <a:pt x="272615" y="4573935"/>
+                </a:lnTo>
+                <a:lnTo>
+                  <a:pt x="290016" y="4519573"/>
+                </a:lnTo>
+                <a:lnTo>
+                  <a:pt x="307892" y="4465366"/>
+                </a:lnTo>
+                <a:lnTo>
+                  <a:pt x="326239" y="4411316"/>
+                </a:lnTo>
+                <a:lnTo>
+                  <a:pt x="345057" y="4357428"/>
                 </a:lnTo>
                 <a:lnTo>
                   <a:pt x="364345" y="4303707"/>
@@ -6657,10 +6661,10 @@
                   <a:pt x="384101" y="4250156"/>
                 </a:lnTo>
                 <a:lnTo>
-                  <a:pt x="404323" y="4196780"/>
-                </a:lnTo>
-                <a:lnTo>
-                  <a:pt x="425011" y="4143582"/>
+                  <a:pt x="404324" y="4196779"/>
+                </a:lnTo>
+                <a:lnTo>
+                  <a:pt x="425011" y="4143581"/>
                 </a:lnTo>
                 <a:lnTo>
                   <a:pt x="446162" y="4090566"/>
@@ -6672,31 +6676,31 @@
                   <a:pt x="489848" y="3985099"/>
                 </a:lnTo>
                 <a:lnTo>
-                  <a:pt x="512379" y="3932655"/>
+                  <a:pt x="512380" y="3932655"/>
                 </a:lnTo>
                 <a:lnTo>
                   <a:pt x="535368" y="3880410"/>
                 </a:lnTo>
                 <a:lnTo>
-                  <a:pt x="558811" y="3828368"/>
+                  <a:pt x="558812" y="3828367"/>
                 </a:lnTo>
                 <a:lnTo>
                   <a:pt x="582708" y="3776532"/>
                 </a:lnTo>
                 <a:lnTo>
-                  <a:pt x="607056" y="3724907"/>
-                </a:lnTo>
-                <a:lnTo>
-                  <a:pt x="631854" y="3673496"/>
-                </a:lnTo>
-                <a:lnTo>
-                  <a:pt x="657099" y="3622303"/>
-                </a:lnTo>
-                <a:lnTo>
-                  <a:pt x="682790" y="3571333"/>
-                </a:lnTo>
-                <a:lnTo>
-                  <a:pt x="708925" y="3520589"/>
+                  <a:pt x="607057" y="3724906"/>
+                </a:lnTo>
+                <a:lnTo>
+                  <a:pt x="631854" y="3673495"/>
+                </a:lnTo>
+                <a:lnTo>
+                  <a:pt x="657100" y="3622303"/>
+                </a:lnTo>
+                <a:lnTo>
+                  <a:pt x="682791" y="3571332"/>
+                </a:lnTo>
+                <a:lnTo>
+                  <a:pt x="708926" y="3520588"/>
                 </a:lnTo>
                 <a:lnTo>
                   <a:pt x="735502" y="3470074"/>
@@ -6711,52 +6715,52 @@
                   <a:pt x="817863" y="3319950"/>
                 </a:lnTo>
                 <a:lnTo>
-                  <a:pt x="846186" y="3270394"/>
-                </a:lnTo>
-                <a:lnTo>
-                  <a:pt x="874941" y="3221088"/>
-                </a:lnTo>
-                <a:lnTo>
-                  <a:pt x="904125" y="3172034"/>
-                </a:lnTo>
-                <a:lnTo>
-                  <a:pt x="933736" y="3123236"/>
-                </a:lnTo>
-                <a:lnTo>
-                  <a:pt x="963772" y="3074699"/>
-                </a:lnTo>
-                <a:lnTo>
-                  <a:pt x="994230" y="3026426"/>
+                  <a:pt x="846187" y="3270394"/>
+                </a:lnTo>
+                <a:lnTo>
+                  <a:pt x="874942" y="3221087"/>
+                </a:lnTo>
+                <a:lnTo>
+                  <a:pt x="904126" y="3172033"/>
+                </a:lnTo>
+                <a:lnTo>
+                  <a:pt x="933737" y="3123236"/>
+                </a:lnTo>
+                <a:lnTo>
+                  <a:pt x="963773" y="3074698"/>
+                </a:lnTo>
+                <a:lnTo>
+                  <a:pt x="994231" y="3026425"/>
                 </a:lnTo>
                 <a:lnTo>
                   <a:pt x="1025109" y="2978420"/>
                 </a:lnTo>
                 <a:lnTo>
-                  <a:pt x="1056405" y="2930686"/>
-                </a:lnTo>
-                <a:lnTo>
-                  <a:pt x="1088116" y="2883226"/>
-                </a:lnTo>
-                <a:lnTo>
-                  <a:pt x="1120240" y="2836045"/>
-                </a:lnTo>
-                <a:lnTo>
-                  <a:pt x="1152775" y="2789147"/>
-                </a:lnTo>
-                <a:lnTo>
-                  <a:pt x="1185718" y="2742534"/>
-                </a:lnTo>
-                <a:lnTo>
-                  <a:pt x="1219066" y="2696210"/>
-                </a:lnTo>
-                <a:lnTo>
-                  <a:pt x="1252818" y="2650179"/>
-                </a:lnTo>
-                <a:lnTo>
-                  <a:pt x="1286969" y="2604444"/>
-                </a:lnTo>
-                <a:lnTo>
-                  <a:pt x="1321519" y="2559009"/>
+                  <a:pt x="1056405" y="2930685"/>
+                </a:lnTo>
+                <a:lnTo>
+                  <a:pt x="1088117" y="2883226"/>
+                </a:lnTo>
+                <a:lnTo>
+                  <a:pt x="1120241" y="2836045"/>
+                </a:lnTo>
+                <a:lnTo>
+                  <a:pt x="1152776" y="2789146"/>
+                </a:lnTo>
+                <a:lnTo>
+                  <a:pt x="1185718" y="2742533"/>
+                </a:lnTo>
+                <a:lnTo>
+                  <a:pt x="1219067" y="2696209"/>
+                </a:lnTo>
+                <a:lnTo>
+                  <a:pt x="1252818" y="2650178"/>
+                </a:lnTo>
+                <a:lnTo>
+                  <a:pt x="1286970" y="2604444"/>
+                </a:lnTo>
+                <a:lnTo>
+                  <a:pt x="1321520" y="2559009"/>
                 </a:lnTo>
                 <a:lnTo>
                   <a:pt x="1356464" y="2513877"/>
@@ -6765,10 +6769,10 @@
                   <a:pt x="1391801" y="2469052"/>
                 </a:lnTo>
                 <a:lnTo>
-                  <a:pt x="1427528" y="2424537"/>
-                </a:lnTo>
-                <a:lnTo>
-                  <a:pt x="1463642" y="2380336"/>
+                  <a:pt x="1427529" y="2424537"/>
+                </a:lnTo>
+                <a:lnTo>
+                  <a:pt x="1463643" y="2380335"/>
                 </a:lnTo>
                 <a:lnTo>
                   <a:pt x="1500141" y="2336451"/>
@@ -6780,31 +6784,31 @@
                   <a:pt x="1574280" y="2249645"/>
                 </a:lnTo>
                 <a:lnTo>
-                  <a:pt x="1611914" y="2206731"/>
-                </a:lnTo>
-                <a:lnTo>
-                  <a:pt x="1649922" y="2164147"/>
-                </a:lnTo>
-                <a:lnTo>
-                  <a:pt x="1688300" y="2121896"/>
-                </a:lnTo>
-                <a:lnTo>
-                  <a:pt x="1727046" y="2079982"/>
-                </a:lnTo>
-                <a:lnTo>
-                  <a:pt x="1766155" y="2038407"/>
+                  <a:pt x="1611915" y="2206731"/>
+                </a:lnTo>
+                <a:lnTo>
+                  <a:pt x="1649923" y="2164147"/>
+                </a:lnTo>
+                <a:lnTo>
+                  <a:pt x="1688301" y="2121896"/>
+                </a:lnTo>
+                <a:lnTo>
+                  <a:pt x="1727046" y="2079981"/>
+                </a:lnTo>
+                <a:lnTo>
+                  <a:pt x="1766156" y="2038407"/>
                 </a:lnTo>
                 <a:lnTo>
                   <a:pt x="1805626" y="1997175"/>
                 </a:lnTo>
                 <a:lnTo>
-                  <a:pt x="1845455" y="1956290"/>
-                </a:lnTo>
-                <a:lnTo>
-                  <a:pt x="1885639" y="1915753"/>
-                </a:lnTo>
-                <a:lnTo>
-                  <a:pt x="1926176" y="1875568"/>
+                  <a:pt x="1845456" y="1956289"/>
+                </a:lnTo>
+                <a:lnTo>
+                  <a:pt x="1885640" y="1915752"/>
+                </a:lnTo>
+                <a:lnTo>
+                  <a:pt x="1926177" y="1875568"/>
                 </a:lnTo>
                 <a:lnTo>
                   <a:pt x="1967062" y="1835739"/>
@@ -6813,28 +6817,28 @@
                   <a:pt x="2008294" y="1796268"/>
                 </a:lnTo>
                 <a:lnTo>
-                  <a:pt x="2049868" y="1757159"/>
-                </a:lnTo>
-                <a:lnTo>
-                  <a:pt x="2091783" y="1718414"/>
-                </a:lnTo>
-                <a:lnTo>
-                  <a:pt x="2134034" y="1680036"/>
-                </a:lnTo>
-                <a:lnTo>
-                  <a:pt x="2176618" y="1642028"/>
+                  <a:pt x="2049869" y="1757158"/>
+                </a:lnTo>
+                <a:lnTo>
+                  <a:pt x="2091783" y="1718413"/>
+                </a:lnTo>
+                <a:lnTo>
+                  <a:pt x="2134034" y="1680035"/>
+                </a:lnTo>
+                <a:lnTo>
+                  <a:pt x="2176618" y="1642027"/>
                 </a:lnTo>
                 <a:lnTo>
                   <a:pt x="2219532" y="1604393"/>
                 </a:lnTo>
                 <a:lnTo>
-                  <a:pt x="2262773" y="1567134"/>
+                  <a:pt x="2262774" y="1567134"/>
                 </a:lnTo>
                 <a:lnTo>
                   <a:pt x="2306338" y="1530254"/>
                 </a:lnTo>
                 <a:lnTo>
-                  <a:pt x="2350222" y="1493756"/>
+                  <a:pt x="2350223" y="1493755"/>
                 </a:lnTo>
                 <a:lnTo>
                   <a:pt x="2394424" y="1457641"/>
@@ -6849,88 +6853,88 @@
                   <a:pt x="2528896" y="1351632"/>
                 </a:lnTo>
                 <a:lnTo>
-                  <a:pt x="2574331" y="1317083"/>
-                </a:lnTo>
-                <a:lnTo>
-                  <a:pt x="2620065" y="1282931"/>
-                </a:lnTo>
-                <a:lnTo>
-                  <a:pt x="2666096" y="1249180"/>
-                </a:lnTo>
-                <a:lnTo>
-                  <a:pt x="2712420" y="1215831"/>
-                </a:lnTo>
-                <a:lnTo>
-                  <a:pt x="2759033" y="1182889"/>
-                </a:lnTo>
-                <a:lnTo>
-                  <a:pt x="2805932" y="1150354"/>
+                  <a:pt x="2574331" y="1317082"/>
+                </a:lnTo>
+                <a:lnTo>
+                  <a:pt x="2620066" y="1282931"/>
+                </a:lnTo>
+                <a:lnTo>
+                  <a:pt x="2666097" y="1249179"/>
+                </a:lnTo>
+                <a:lnTo>
+                  <a:pt x="2712421" y="1215831"/>
+                </a:lnTo>
+                <a:lnTo>
+                  <a:pt x="2759034" y="1182888"/>
+                </a:lnTo>
+                <a:lnTo>
+                  <a:pt x="2805932" y="1150353"/>
                 </a:lnTo>
                 <a:lnTo>
                   <a:pt x="2853113" y="1118229"/>
                 </a:lnTo>
                 <a:lnTo>
-                  <a:pt x="2900572" y="1086518"/>
+                  <a:pt x="2900573" y="1086518"/>
                 </a:lnTo>
                 <a:lnTo>
                   <a:pt x="2948307" y="1055222"/>
                 </a:lnTo>
                 <a:lnTo>
-                  <a:pt x="2996312" y="1024344"/>
-                </a:lnTo>
-                <a:lnTo>
-                  <a:pt x="3044585" y="993886"/>
-                </a:lnTo>
-                <a:lnTo>
-                  <a:pt x="3093123" y="963850"/>
-                </a:lnTo>
-                <a:lnTo>
-                  <a:pt x="3141920" y="934239"/>
-                </a:lnTo>
-                <a:lnTo>
-                  <a:pt x="3190974" y="905055"/>
-                </a:lnTo>
-                <a:lnTo>
-                  <a:pt x="3240281" y="876300"/>
+                  <a:pt x="2996313" y="1024343"/>
+                </a:lnTo>
+                <a:lnTo>
+                  <a:pt x="3044586" y="993885"/>
+                </a:lnTo>
+                <a:lnTo>
+                  <a:pt x="3093123" y="963849"/>
+                </a:lnTo>
+                <a:lnTo>
+                  <a:pt x="3141921" y="934238"/>
+                </a:lnTo>
+                <a:lnTo>
+                  <a:pt x="3190975" y="905054"/>
+                </a:lnTo>
+                <a:lnTo>
+                  <a:pt x="3240282" y="876299"/>
                 </a:lnTo>
                 <a:lnTo>
                   <a:pt x="3289837" y="847976"/>
                 </a:lnTo>
                 <a:lnTo>
-                  <a:pt x="3339638" y="820086"/>
+                  <a:pt x="3339639" y="820086"/>
                 </a:lnTo>
                 <a:lnTo>
                   <a:pt x="3389681" y="792632"/>
                 </a:lnTo>
                 <a:lnTo>
-                  <a:pt x="3439961" y="765615"/>
-                </a:lnTo>
-                <a:lnTo>
-                  <a:pt x="3490475" y="739039"/>
-                </a:lnTo>
-                <a:lnTo>
-                  <a:pt x="3541219" y="712904"/>
-                </a:lnTo>
-                <a:lnTo>
-                  <a:pt x="3592190" y="687213"/>
-                </a:lnTo>
-                <a:lnTo>
-                  <a:pt x="3643382" y="661967"/>
-                </a:lnTo>
-                <a:lnTo>
-                  <a:pt x="3694793" y="637169"/>
+                  <a:pt x="3439962" y="765615"/>
+                </a:lnTo>
+                <a:lnTo>
+                  <a:pt x="3490476" y="739038"/>
+                </a:lnTo>
+                <a:lnTo>
+                  <a:pt x="3541220" y="712903"/>
+                </a:lnTo>
+                <a:lnTo>
+                  <a:pt x="3592190" y="687212"/>
+                </a:lnTo>
+                <a:lnTo>
+                  <a:pt x="3643383" y="661967"/>
+                </a:lnTo>
+                <a:lnTo>
+                  <a:pt x="3694794" y="637169"/>
                 </a:lnTo>
                 <a:lnTo>
                   <a:pt x="3746419" y="612821"/>
                 </a:lnTo>
                 <a:lnTo>
-                  <a:pt x="3798254" y="588925"/>
+                  <a:pt x="3798255" y="588924"/>
                 </a:lnTo>
                 <a:lnTo>
                   <a:pt x="3850297" y="565481"/>
                 </a:lnTo>
                 <a:lnTo>
-                  <a:pt x="3902542" y="542493"/>
+                  <a:pt x="3902542" y="542492"/>
                 </a:lnTo>
                 <a:lnTo>
                   <a:pt x="3954986" y="519961"/>
@@ -6942,10 +6946,10 @@
                   <a:pt x="4060453" y="476275"/>
                 </a:lnTo>
                 <a:lnTo>
-                  <a:pt x="4113468" y="455124"/>
-                </a:lnTo>
-                <a:lnTo>
-                  <a:pt x="4166666" y="434437"/>
+                  <a:pt x="4113469" y="455124"/>
+                </a:lnTo>
+                <a:lnTo>
+                  <a:pt x="4166667" y="434436"/>
                 </a:lnTo>
                 <a:lnTo>
                   <a:pt x="4220043" y="414214"/>
@@ -6954,31 +6958,31 @@
                   <a:pt x="4273594" y="394458"/>
                 </a:lnTo>
                 <a:lnTo>
-                  <a:pt x="4327315" y="375170"/>
-                </a:lnTo>
-                <a:lnTo>
-                  <a:pt x="4381203" y="356352"/>
+                  <a:pt x="4327316" y="375170"/>
+                </a:lnTo>
+                <a:lnTo>
+                  <a:pt x="4381203" y="356351"/>
                 </a:lnTo>
                 <a:lnTo>
                   <a:pt x="4435253" y="338004"/>
                 </a:lnTo>
                 <a:lnTo>
-                  <a:pt x="4489460" y="320129"/>
-                </a:lnTo>
-                <a:lnTo>
-                  <a:pt x="4543822" y="302728"/>
-                </a:lnTo>
-                <a:lnTo>
-                  <a:pt x="4598334" y="285802"/>
-                </a:lnTo>
-                <a:lnTo>
-                  <a:pt x="4652991" y="269352"/>
+                  <a:pt x="4489461" y="320129"/>
+                </a:lnTo>
+                <a:lnTo>
+                  <a:pt x="4543823" y="302728"/>
+                </a:lnTo>
+                <a:lnTo>
+                  <a:pt x="4598334" y="285801"/>
+                </a:lnTo>
+                <a:lnTo>
+                  <a:pt x="4652991" y="269351"/>
                 </a:lnTo>
                 <a:lnTo>
                   <a:pt x="4707790" y="253379"/>
                 </a:lnTo>
                 <a:lnTo>
-                  <a:pt x="4762725" y="237886"/>
+                  <a:pt x="4762726" y="237885"/>
                 </a:lnTo>
                 <a:lnTo>
                   <a:pt x="4817795" y="222872"/>
@@ -6987,100 +6991,100 @@
                   <a:pt x="4872993" y="208340"/>
                 </a:lnTo>
                 <a:lnTo>
-                  <a:pt x="4928315" y="194290"/>
-                </a:lnTo>
-                <a:lnTo>
-                  <a:pt x="4983758" y="180723"/>
+                  <a:pt x="4928316" y="194289"/>
+                </a:lnTo>
+                <a:lnTo>
+                  <a:pt x="4983759" y="180722"/>
                 </a:lnTo>
                 <a:lnTo>
                   <a:pt x="5039318" y="167640"/>
                 </a:lnTo>
                 <a:lnTo>
-                  <a:pt x="5094989" y="155043"/>
+                  <a:pt x="5094990" y="155043"/>
                 </a:lnTo>
                 <a:lnTo>
                   <a:pt x="5150769" y="142932"/>
                 </a:lnTo>
                 <a:lnTo>
-                  <a:pt x="5206652" y="131309"/>
+                  <a:pt x="5206652" y="131308"/>
                 </a:lnTo>
                 <a:lnTo>
                   <a:pt x="5262634" y="120173"/>
                 </a:lnTo>
                 <a:lnTo>
-                  <a:pt x="5318711" y="109527"/>
-                </a:lnTo>
-                <a:lnTo>
-                  <a:pt x="5374879" y="99370"/>
+                  <a:pt x="5318712" y="109526"/>
+                </a:lnTo>
+                <a:lnTo>
+                  <a:pt x="5374880" y="99369"/>
                 </a:lnTo>
                 <a:lnTo>
                   <a:pt x="5431134" y="89703"/>
                 </a:lnTo>
                 <a:lnTo>
-                  <a:pt x="5487470" y="80528"/>
+                  <a:pt x="5487471" y="80528"/>
                 </a:lnTo>
                 <a:lnTo>
                   <a:pt x="5543885" y="71845"/>
                 </a:lnTo>
                 <a:lnTo>
-                  <a:pt x="5600373" y="63655"/>
-                </a:lnTo>
-                <a:lnTo>
-                  <a:pt x="5656931" y="55958"/>
-                </a:lnTo>
-                <a:lnTo>
-                  <a:pt x="5713553" y="48754"/>
-                </a:lnTo>
-                <a:lnTo>
-                  <a:pt x="5770237" y="42046"/>
-                </a:lnTo>
-                <a:lnTo>
-                  <a:pt x="5826977" y="35832"/>
-                </a:lnTo>
-                <a:lnTo>
-                  <a:pt x="5883768" y="30113"/>
+                  <a:pt x="5600374" y="63654"/>
+                </a:lnTo>
+                <a:lnTo>
+                  <a:pt x="5656931" y="55957"/>
+                </a:lnTo>
+                <a:lnTo>
+                  <a:pt x="5713554" y="48754"/>
+                </a:lnTo>
+                <a:lnTo>
+                  <a:pt x="5770237" y="42045"/>
+                </a:lnTo>
+                <a:lnTo>
+                  <a:pt x="5826977" y="35831"/>
+                </a:lnTo>
+                <a:lnTo>
+                  <a:pt x="5883769" y="30112"/>
                 </a:lnTo>
                 <a:lnTo>
                   <a:pt x="5940608" y="24890"/>
                 </a:lnTo>
                 <a:lnTo>
-                  <a:pt x="5997491" y="20164"/>
+                  <a:pt x="5997491" y="20163"/>
                 </a:lnTo>
                 <a:lnTo>
                   <a:pt x="6054413" y="15933"/>
                 </a:lnTo>
                 <a:lnTo>
-                  <a:pt x="6111369" y="12200"/>
+                  <a:pt x="6111370" y="12200"/>
                 </a:lnTo>
                 <a:lnTo>
                   <a:pt x="6168357" y="8964"/>
                 </a:lnTo>
                 <a:lnTo>
-                  <a:pt x="6225370" y="6226"/>
-                </a:lnTo>
-                <a:lnTo>
-                  <a:pt x="6282405" y="3985"/>
-                </a:lnTo>
-                <a:lnTo>
-                  <a:pt x="6339457" y="2242"/>
-                </a:lnTo>
-                <a:lnTo>
-                  <a:pt x="6396523" y="997"/>
+                  <a:pt x="6225370" y="6225"/>
+                </a:lnTo>
+                <a:lnTo>
+                  <a:pt x="6282405" y="3984"/>
+                </a:lnTo>
+                <a:lnTo>
+                  <a:pt x="6339458" y="2241"/>
+                </a:lnTo>
+                <a:lnTo>
+                  <a:pt x="6396523" y="996"/>
                 </a:lnTo>
                 <a:lnTo>
                   <a:pt x="6453597" y="249"/>
                 </a:lnTo>
                 <a:lnTo>
-                  <a:pt x="6510675" y="0"/>
-                </a:lnTo>
-                <a:lnTo>
-                  <a:pt x="6567753" y="249"/>
-                </a:lnTo>
-                <a:lnTo>
-                  <a:pt x="6624828" y="997"/>
-                </a:lnTo>
-                <a:lnTo>
-                  <a:pt x="6681893" y="2242"/>
+                  <a:pt x="6510676" y="0"/>
+                </a:lnTo>
+                <a:lnTo>
+                  <a:pt x="6567754" y="249"/>
+                </a:lnTo>
+                <a:lnTo>
+                  <a:pt x="6624828" y="996"/>
+                </a:lnTo>
+                <a:lnTo>
+                  <a:pt x="6681893" y="2241"/>
                 </a:lnTo>
               </a:path>
             </a:pathLst>
@@ -7572,7 +7576,7 @@
             <a:gdLst/>
             <a:ahLst/>
             <a:cxnLst/>
-            <a:rect l="l" t="t" r="r" b="b"/>
+            <a:rect l="0" t="0" r="r" b="b"/>
             <a:pathLst>
               <a:path w="1763179" h="1687876">
                 <a:moveTo>
@@ -7582,28 +7586,28 @@
                   <a:pt x="1741816" y="1682052"/>
                 </a:lnTo>
                 <a:lnTo>
-                  <a:pt x="1720505" y="1676041"/>
-                </a:lnTo>
-                <a:lnTo>
-                  <a:pt x="1699248" y="1669845"/>
+                  <a:pt x="1720505" y="1676042"/>
+                </a:lnTo>
+                <a:lnTo>
+                  <a:pt x="1699247" y="1669846"/>
                 </a:lnTo>
                 <a:lnTo>
                   <a:pt x="1678045" y="1663464"/>
                 </a:lnTo>
                 <a:lnTo>
-                  <a:pt x="1656899" y="1656898"/>
-                </a:lnTo>
-                <a:lnTo>
-                  <a:pt x="1635811" y="1650148"/>
-                </a:lnTo>
-                <a:lnTo>
-                  <a:pt x="1614782" y="1643213"/>
+                  <a:pt x="1656898" y="1656898"/>
+                </a:lnTo>
+                <a:lnTo>
+                  <a:pt x="1635810" y="1650148"/>
+                </a:lnTo>
+                <a:lnTo>
+                  <a:pt x="1614782" y="1643214"/>
                 </a:lnTo>
                 <a:lnTo>
                   <a:pt x="1593815" y="1636096"/>
                 </a:lnTo>
                 <a:lnTo>
-                  <a:pt x="1572911" y="1628796"/>
+                  <a:pt x="1572910" y="1628796"/>
                 </a:lnTo>
                 <a:lnTo>
                   <a:pt x="1552071" y="1621314"/>
@@ -7612,37 +7616,37 @@
                   <a:pt x="1531297" y="1613650"/>
                 </a:lnTo>
                 <a:lnTo>
-                  <a:pt x="1510591" y="1605805"/>
-                </a:lnTo>
-                <a:lnTo>
-                  <a:pt x="1489955" y="1597780"/>
-                </a:lnTo>
-                <a:lnTo>
-                  <a:pt x="1469389" y="1589575"/>
+                  <a:pt x="1510591" y="1605806"/>
+                </a:lnTo>
+                <a:lnTo>
+                  <a:pt x="1489954" y="1597780"/>
+                </a:lnTo>
+                <a:lnTo>
+                  <a:pt x="1469388" y="1589575"/>
                 </a:lnTo>
                 <a:lnTo>
                   <a:pt x="1448895" y="1581191"/>
                 </a:lnTo>
                 <a:lnTo>
-                  <a:pt x="1428476" y="1572628"/>
-                </a:lnTo>
-                <a:lnTo>
-                  <a:pt x="1408132" y="1563888"/>
-                </a:lnTo>
-                <a:lnTo>
-                  <a:pt x="1387865" y="1554970"/>
+                  <a:pt x="1428475" y="1572629"/>
+                </a:lnTo>
+                <a:lnTo>
+                  <a:pt x="1408131" y="1563888"/>
+                </a:lnTo>
+                <a:lnTo>
+                  <a:pt x="1387864" y="1554970"/>
                 </a:lnTo>
                 <a:lnTo>
                   <a:pt x="1367676" y="1545876"/>
                 </a:lnTo>
                 <a:lnTo>
-                  <a:pt x="1347568" y="1536606"/>
+                  <a:pt x="1347567" y="1536606"/>
                 </a:lnTo>
                 <a:lnTo>
                   <a:pt x="1327541" y="1527161"/>
                 </a:lnTo>
                 <a:lnTo>
-                  <a:pt x="1307598" y="1517541"/>
+                  <a:pt x="1307597" y="1517541"/>
                 </a:lnTo>
                 <a:lnTo>
                   <a:pt x="1287739" y="1507748"/>
@@ -7651,13 +7655,13 @@
                   <a:pt x="1267966" y="1497782"/>
                 </a:lnTo>
                 <a:lnTo>
-                  <a:pt x="1248282" y="1487643"/>
-                </a:lnTo>
-                <a:lnTo>
-                  <a:pt x="1228686" y="1477333"/>
-                </a:lnTo>
-                <a:lnTo>
-                  <a:pt x="1209181" y="1466853"/>
+                  <a:pt x="1248281" y="1487644"/>
+                </a:lnTo>
+                <a:lnTo>
+                  <a:pt x="1228686" y="1477334"/>
+                </a:lnTo>
+                <a:lnTo>
+                  <a:pt x="1209181" y="1466854"/>
                 </a:lnTo>
                 <a:lnTo>
                   <a:pt x="1189768" y="1456203"/>
@@ -7666,7 +7670,7 @@
                   <a:pt x="1170449" y="1445384"/>
                 </a:lnTo>
                 <a:lnTo>
-                  <a:pt x="1151226" y="1434396"/>
+                  <a:pt x="1151225" y="1434397"/>
                 </a:lnTo>
                 <a:lnTo>
                   <a:pt x="1132098" y="1423242"/>
@@ -7678,82 +7682,82 @@
                   <a:pt x="1094139" y="1400434"/>
                 </a:lnTo>
                 <a:lnTo>
-                  <a:pt x="1075311" y="1388782"/>
+                  <a:pt x="1075310" y="1388783"/>
                 </a:lnTo>
                 <a:lnTo>
                   <a:pt x="1056584" y="1376967"/>
                 </a:lnTo>
                 <a:lnTo>
-                  <a:pt x="1037962" y="1364988"/>
-                </a:lnTo>
-                <a:lnTo>
-                  <a:pt x="1019445" y="1352848"/>
-                </a:lnTo>
-                <a:lnTo>
-                  <a:pt x="1001034" y="1340546"/>
-                </a:lnTo>
-                <a:lnTo>
-                  <a:pt x="982732" y="1328085"/>
-                </a:lnTo>
-                <a:lnTo>
-                  <a:pt x="964539" y="1315464"/>
-                </a:lnTo>
-                <a:lnTo>
-                  <a:pt x="946456" y="1302684"/>
+                  <a:pt x="1037962" y="1364989"/>
+                </a:lnTo>
+                <a:lnTo>
+                  <a:pt x="1019444" y="1352848"/>
+                </a:lnTo>
+                <a:lnTo>
+                  <a:pt x="1001034" y="1340547"/>
+                </a:lnTo>
+                <a:lnTo>
+                  <a:pt x="982731" y="1328085"/>
+                </a:lnTo>
+                <a:lnTo>
+                  <a:pt x="964538" y="1315464"/>
+                </a:lnTo>
+                <a:lnTo>
+                  <a:pt x="946456" y="1302685"/>
                 </a:lnTo>
                 <a:lnTo>
                   <a:pt x="928486" y="1289748"/>
                 </a:lnTo>
                 <a:lnTo>
-                  <a:pt x="910630" y="1276655"/>
+                  <a:pt x="910629" y="1276655"/>
                 </a:lnTo>
                 <a:lnTo>
                   <a:pt x="892888" y="1263407"/>
                 </a:lnTo>
                 <a:lnTo>
-                  <a:pt x="875263" y="1250004"/>
-                </a:lnTo>
-                <a:lnTo>
-                  <a:pt x="857755" y="1236448"/>
-                </a:lnTo>
-                <a:lnTo>
-                  <a:pt x="840367" y="1222740"/>
+                  <a:pt x="875263" y="1250005"/>
+                </a:lnTo>
+                <a:lnTo>
+                  <a:pt x="857755" y="1236449"/>
+                </a:lnTo>
+                <a:lnTo>
+                  <a:pt x="840366" y="1222741"/>
                 </a:lnTo>
                 <a:lnTo>
                   <a:pt x="823098" y="1208881"/>
                 </a:lnTo>
                 <a:lnTo>
-                  <a:pt x="805952" y="1194871"/>
-                </a:lnTo>
-                <a:lnTo>
-                  <a:pt x="788928" y="1180713"/>
-                </a:lnTo>
-                <a:lnTo>
-                  <a:pt x="772028" y="1166406"/>
-                </a:lnTo>
-                <a:lnTo>
-                  <a:pt x="755254" y="1151953"/>
-                </a:lnTo>
-                <a:lnTo>
-                  <a:pt x="738606" y="1137353"/>
+                  <a:pt x="805951" y="1194872"/>
+                </a:lnTo>
+                <a:lnTo>
+                  <a:pt x="788927" y="1180713"/>
+                </a:lnTo>
+                <a:lnTo>
+                  <a:pt x="772028" y="1166407"/>
+                </a:lnTo>
+                <a:lnTo>
+                  <a:pt x="755253" y="1151953"/>
+                </a:lnTo>
+                <a:lnTo>
+                  <a:pt x="738606" y="1137354"/>
                 </a:lnTo>
                 <a:lnTo>
                   <a:pt x="722087" y="1122609"/>
                 </a:lnTo>
                 <a:lnTo>
-                  <a:pt x="705697" y="1107721"/>
-                </a:lnTo>
-                <a:lnTo>
-                  <a:pt x="689437" y="1092691"/>
-                </a:lnTo>
-                <a:lnTo>
-                  <a:pt x="673310" y="1077520"/>
-                </a:lnTo>
-                <a:lnTo>
-                  <a:pt x="657315" y="1062208"/>
-                </a:lnTo>
-                <a:lnTo>
-                  <a:pt x="641454" y="1046757"/>
+                  <a:pt x="705697" y="1107722"/>
+                </a:lnTo>
+                <a:lnTo>
+                  <a:pt x="689437" y="1092692"/>
+                </a:lnTo>
+                <a:lnTo>
+                  <a:pt x="673309" y="1077520"/>
+                </a:lnTo>
+                <a:lnTo>
+                  <a:pt x="657315" y="1062209"/>
+                </a:lnTo>
+                <a:lnTo>
+                  <a:pt x="641454" y="1046758"/>
                 </a:lnTo>
                 <a:lnTo>
                   <a:pt x="625729" y="1031169"/>
@@ -7762,31 +7766,31 @@
                   <a:pt x="610141" y="1015444"/>
                 </a:lnTo>
                 <a:lnTo>
-                  <a:pt x="594690" y="999583"/>
-                </a:lnTo>
-                <a:lnTo>
-                  <a:pt x="579379" y="983589"/>
+                  <a:pt x="594690" y="999584"/>
+                </a:lnTo>
+                <a:lnTo>
+                  <a:pt x="579378" y="983589"/>
                 </a:lnTo>
                 <a:lnTo>
                   <a:pt x="564207" y="967461"/>
                 </a:lnTo>
                 <a:lnTo>
-                  <a:pt x="549177" y="951201"/>
-                </a:lnTo>
-                <a:lnTo>
-                  <a:pt x="534289" y="934811"/>
+                  <a:pt x="549177" y="951202"/>
+                </a:lnTo>
+                <a:lnTo>
+                  <a:pt x="534289" y="934812"/>
                 </a:lnTo>
                 <a:lnTo>
                   <a:pt x="519545" y="918292"/>
                 </a:lnTo>
                 <a:lnTo>
-                  <a:pt x="504946" y="901644"/>
-                </a:lnTo>
-                <a:lnTo>
-                  <a:pt x="490492" y="884870"/>
-                </a:lnTo>
-                <a:lnTo>
-                  <a:pt x="476186" y="867971"/>
+                  <a:pt x="504945" y="901645"/>
+                </a:lnTo>
+                <a:lnTo>
+                  <a:pt x="490492" y="884871"/>
+                </a:lnTo>
+                <a:lnTo>
+                  <a:pt x="476185" y="867971"/>
                 </a:lnTo>
                 <a:lnTo>
                   <a:pt x="462027" y="850947"/>
@@ -7801,10 +7805,10 @@
                   <a:pt x="420450" y="799143"/>
                 </a:lnTo>
                 <a:lnTo>
-                  <a:pt x="406894" y="781635"/>
-                </a:lnTo>
-                <a:lnTo>
-                  <a:pt x="393492" y="764010"/>
+                  <a:pt x="406894" y="781636"/>
+                </a:lnTo>
+                <a:lnTo>
+                  <a:pt x="393491" y="764011"/>
                 </a:lnTo>
                 <a:lnTo>
                   <a:pt x="380243" y="746269"/>
@@ -7816,19 +7820,19 @@
                   <a:pt x="354214" y="710442"/>
                 </a:lnTo>
                 <a:lnTo>
-                  <a:pt x="341435" y="692360"/>
-                </a:lnTo>
-                <a:lnTo>
-                  <a:pt x="328814" y="674167"/>
-                </a:lnTo>
-                <a:lnTo>
-                  <a:pt x="316352" y="655864"/>
+                  <a:pt x="341434" y="692360"/>
+                </a:lnTo>
+                <a:lnTo>
+                  <a:pt x="328813" y="674167"/>
+                </a:lnTo>
+                <a:lnTo>
+                  <a:pt x="316352" y="655865"/>
                 </a:lnTo>
                 <a:lnTo>
                   <a:pt x="304050" y="637454"/>
                 </a:lnTo>
                 <a:lnTo>
-                  <a:pt x="291910" y="618936"/>
+                  <a:pt x="291910" y="618937"/>
                 </a:lnTo>
                 <a:lnTo>
                   <a:pt x="279931" y="600314"/>
@@ -7837,61 +7841,61 @@
                   <a:pt x="268116" y="581588"/>
                 </a:lnTo>
                 <a:lnTo>
-                  <a:pt x="256465" y="562759"/>
-                </a:lnTo>
-                <a:lnTo>
-                  <a:pt x="244978" y="543829"/>
-                </a:lnTo>
-                <a:lnTo>
-                  <a:pt x="233657" y="524800"/>
+                  <a:pt x="256464" y="562759"/>
+                </a:lnTo>
+                <a:lnTo>
+                  <a:pt x="244977" y="543830"/>
+                </a:lnTo>
+                <a:lnTo>
+                  <a:pt x="233656" y="524800"/>
                 </a:lnTo>
                 <a:lnTo>
                   <a:pt x="222502" y="505673"/>
                 </a:lnTo>
                 <a:lnTo>
-                  <a:pt x="211515" y="486449"/>
+                  <a:pt x="211514" y="486449"/>
                 </a:lnTo>
                 <a:lnTo>
                   <a:pt x="200695" y="467130"/>
                 </a:lnTo>
                 <a:lnTo>
-                  <a:pt x="190045" y="447717"/>
-                </a:lnTo>
-                <a:lnTo>
-                  <a:pt x="179565" y="428212"/>
+                  <a:pt x="190045" y="447718"/>
+                </a:lnTo>
+                <a:lnTo>
+                  <a:pt x="179565" y="428213"/>
                 </a:lnTo>
                 <a:lnTo>
                   <a:pt x="169255" y="408617"/>
                 </a:lnTo>
                 <a:lnTo>
-                  <a:pt x="159117" y="388932"/>
-                </a:lnTo>
-                <a:lnTo>
-                  <a:pt x="149151" y="369159"/>
+                  <a:pt x="159116" y="388932"/>
+                </a:lnTo>
+                <a:lnTo>
+                  <a:pt x="149150" y="369160"/>
                 </a:lnTo>
                 <a:lnTo>
                   <a:pt x="139357" y="349301"/>
                 </a:lnTo>
                 <a:lnTo>
-                  <a:pt x="129738" y="329357"/>
-                </a:lnTo>
-                <a:lnTo>
-                  <a:pt x="120293" y="309331"/>
-                </a:lnTo>
-                <a:lnTo>
-                  <a:pt x="111023" y="289222"/>
+                  <a:pt x="129737" y="329358"/>
+                </a:lnTo>
+                <a:lnTo>
+                  <a:pt x="120292" y="309331"/>
+                </a:lnTo>
+                <a:lnTo>
+                  <a:pt x="111022" y="289223"/>
                 </a:lnTo>
                 <a:lnTo>
                   <a:pt x="101928" y="269034"/>
                 </a:lnTo>
                 <a:lnTo>
-                  <a:pt x="93011" y="248767"/>
+                  <a:pt x="93010" y="248767"/>
                 </a:lnTo>
                 <a:lnTo>
                   <a:pt x="84270" y="228423"/>
                 </a:lnTo>
                 <a:lnTo>
-                  <a:pt x="75707" y="208003"/>
+                  <a:pt x="75707" y="208004"/>
                 </a:lnTo>
                 <a:lnTo>
                   <a:pt x="67323" y="187510"/>
@@ -7906,19 +7910,19 @@
                   <a:pt x="43248" y="125601"/>
                 </a:lnTo>
                 <a:lnTo>
-                  <a:pt x="35585" y="104827"/>
+                  <a:pt x="35584" y="104828"/>
                 </a:lnTo>
                 <a:lnTo>
                   <a:pt x="28102" y="83988"/>
                 </a:lnTo>
                 <a:lnTo>
-                  <a:pt x="20802" y="63083"/>
-                </a:lnTo>
-                <a:lnTo>
-                  <a:pt x="13685" y="42116"/>
-                </a:lnTo>
-                <a:lnTo>
-                  <a:pt x="6751" y="21088"/>
+                  <a:pt x="20802" y="63084"/>
+                </a:lnTo>
+                <a:lnTo>
+                  <a:pt x="13685" y="42117"/>
+                </a:lnTo>
+                <a:lnTo>
+                  <a:pt x="6750" y="21088"/>
                 </a:lnTo>
                 <a:lnTo>
                   <a:pt x="0" y="0"/>
@@ -8354,30 +8358,30 @@
         <p:spPr>
           <a:xfrm>
             <a:off x="10564302" y="19148"/>
-            <a:ext cx="1619546" cy="1346962"/>
+            <a:ext cx="1619545" cy="1346962"/>
           </a:xfrm>
           <a:custGeom>
             <a:avLst/>
             <a:gdLst/>
             <a:ahLst/>
             <a:cxnLst/>
-            <a:rect l="l" t="t" r="r" b="b"/>
+            <a:rect l="0" t="0" r="r" b="b"/>
             <a:pathLst>
-              <a:path w="1619546" h="1346962">
+              <a:path w="1619545" h="1346962">
                 <a:moveTo>
-                  <a:pt x="1619546" y="1346962"/>
+                  <a:pt x="1619545" y="1346962"/>
                 </a:moveTo>
                 <a:lnTo>
-                  <a:pt x="1599041" y="1341754"/>
-                </a:lnTo>
-                <a:lnTo>
-                  <a:pt x="1578582" y="1336368"/>
+                  <a:pt x="1599040" y="1341754"/>
+                </a:lnTo>
+                <a:lnTo>
+                  <a:pt x="1578581" y="1336368"/>
                 </a:lnTo>
                 <a:lnTo>
                   <a:pt x="1558170" y="1330803"/>
                 </a:lnTo>
                 <a:lnTo>
-                  <a:pt x="1537808" y="1325061"/>
+                  <a:pt x="1537808" y="1325060"/>
                 </a:lnTo>
                 <a:lnTo>
                   <a:pt x="1517497" y="1319140"/>
@@ -8386,61 +8390,61 @@
                   <a:pt x="1497239" y="1313043"/>
                 </a:lnTo>
                 <a:lnTo>
-                  <a:pt x="1477034" y="1306770"/>
+                  <a:pt x="1477034" y="1306769"/>
                 </a:lnTo>
                 <a:lnTo>
                   <a:pt x="1456885" y="1300320"/>
                 </a:lnTo>
                 <a:lnTo>
-                  <a:pt x="1436793" y="1293695"/>
+                  <a:pt x="1436793" y="1293694"/>
                 </a:lnTo>
                 <a:lnTo>
                   <a:pt x="1416760" y="1286894"/>
                 </a:lnTo>
                 <a:lnTo>
-                  <a:pt x="1396787" y="1279919"/>
+                  <a:pt x="1396786" y="1279919"/>
                 </a:lnTo>
                 <a:lnTo>
                   <a:pt x="1376875" y="1272770"/>
                 </a:lnTo>
                 <a:lnTo>
-                  <a:pt x="1357026" y="1265448"/>
-                </a:lnTo>
-                <a:lnTo>
-                  <a:pt x="1337243" y="1257952"/>
-                </a:lnTo>
-                <a:lnTo>
-                  <a:pt x="1317525" y="1250284"/>
-                </a:lnTo>
-                <a:lnTo>
-                  <a:pt x="1297875" y="1242445"/>
+                  <a:pt x="1357026" y="1265447"/>
+                </a:lnTo>
+                <a:lnTo>
+                  <a:pt x="1337242" y="1257952"/>
+                </a:lnTo>
+                <a:lnTo>
+                  <a:pt x="1317524" y="1250284"/>
+                </a:lnTo>
+                <a:lnTo>
+                  <a:pt x="1297874" y="1242444"/>
                 </a:lnTo>
                 <a:lnTo>
                   <a:pt x="1278294" y="1234434"/>
                 </a:lnTo>
                 <a:lnTo>
-                  <a:pt x="1258784" y="1226253"/>
-                </a:lnTo>
-                <a:lnTo>
-                  <a:pt x="1239346" y="1217901"/>
+                  <a:pt x="1258783" y="1226252"/>
+                </a:lnTo>
+                <a:lnTo>
+                  <a:pt x="1239345" y="1217901"/>
                 </a:lnTo>
                 <a:lnTo>
                   <a:pt x="1219981" y="1209381"/>
                 </a:lnTo>
                 <a:lnTo>
-                  <a:pt x="1200692" y="1200692"/>
-                </a:lnTo>
-                <a:lnTo>
-                  <a:pt x="1181479" y="1191834"/>
+                  <a:pt x="1200691" y="1200691"/>
+                </a:lnTo>
+                <a:lnTo>
+                  <a:pt x="1181478" y="1191834"/>
                 </a:lnTo>
                 <a:lnTo>
                   <a:pt x="1162344" y="1182810"/>
                 </a:lnTo>
                 <a:lnTo>
-                  <a:pt x="1143289" y="1173619"/>
-                </a:lnTo>
-                <a:lnTo>
-                  <a:pt x="1124314" y="1164262"/>
+                  <a:pt x="1143288" y="1173618"/>
+                </a:lnTo>
+                <a:lnTo>
+                  <a:pt x="1124314" y="1164261"/>
                 </a:lnTo>
                 <a:lnTo>
                   <a:pt x="1105422" y="1154739"/>
@@ -8449,37 +8453,37 @@
                   <a:pt x="1086614" y="1145052"/>
                 </a:lnTo>
                 <a:lnTo>
-                  <a:pt x="1067891" y="1135202"/>
+                  <a:pt x="1067891" y="1135201"/>
                 </a:lnTo>
                 <a:lnTo>
                   <a:pt x="1049255" y="1125188"/>
                 </a:lnTo>
                 <a:lnTo>
-                  <a:pt x="1030707" y="1115012"/>
-                </a:lnTo>
-                <a:lnTo>
-                  <a:pt x="1012248" y="1104675"/>
-                </a:lnTo>
-                <a:lnTo>
-                  <a:pt x="993880" y="1094177"/>
-                </a:lnTo>
-                <a:lnTo>
-                  <a:pt x="975605" y="1083519"/>
-                </a:lnTo>
-                <a:lnTo>
-                  <a:pt x="957423" y="1072702"/>
-                </a:lnTo>
-                <a:lnTo>
-                  <a:pt x="939336" y="1061727"/>
+                  <a:pt x="1030706" y="1115012"/>
+                </a:lnTo>
+                <a:lnTo>
+                  <a:pt x="1012248" y="1104674"/>
+                </a:lnTo>
+                <a:lnTo>
+                  <a:pt x="993880" y="1094176"/>
+                </a:lnTo>
+                <a:lnTo>
+                  <a:pt x="975604" y="1083518"/>
+                </a:lnTo>
+                <a:lnTo>
+                  <a:pt x="957423" y="1072701"/>
+                </a:lnTo>
+                <a:lnTo>
+                  <a:pt x="939336" y="1061726"/>
                 </a:lnTo>
                 <a:lnTo>
                   <a:pt x="921346" y="1050594"/>
                 </a:lnTo>
                 <a:lnTo>
-                  <a:pt x="903454" y="1039305"/>
-                </a:lnTo>
-                <a:lnTo>
-                  <a:pt x="885661" y="1027860"/>
+                  <a:pt x="903453" y="1039304"/>
+                </a:lnTo>
+                <a:lnTo>
+                  <a:pt x="885660" y="1027859"/>
                 </a:lnTo>
                 <a:lnTo>
                   <a:pt x="867968" y="1016260"/>
@@ -8497,22 +8501,22 @@
                   <a:pt x="798230" y="968330"/>
                 </a:lnTo>
                 <a:lnTo>
-                  <a:pt x="781060" y="955970"/>
+                  <a:pt x="781060" y="955969"/>
                 </a:lnTo>
                 <a:lnTo>
                   <a:pt x="763999" y="943460"/>
                 </a:lnTo>
                 <a:lnTo>
-                  <a:pt x="747047" y="930802"/>
+                  <a:pt x="747047" y="930801"/>
                 </a:lnTo>
                 <a:lnTo>
                   <a:pt x="730207" y="917996"/>
                 </a:lnTo>
                 <a:lnTo>
-                  <a:pt x="713479" y="905044"/>
-                </a:lnTo>
-                <a:lnTo>
-                  <a:pt x="696865" y="891946"/>
+                  <a:pt x="713479" y="905043"/>
+                </a:lnTo>
+                <a:lnTo>
+                  <a:pt x="696864" y="891946"/>
                 </a:lnTo>
                 <a:lnTo>
                   <a:pt x="680365" y="878704"/>
@@ -8524,13 +8528,13 @@
                   <a:pt x="647716" y="851790"/>
                 </a:lnTo>
                 <a:lnTo>
-                  <a:pt x="631569" y="838121"/>
+                  <a:pt x="631569" y="838120"/>
                 </a:lnTo>
                 <a:lnTo>
                   <a:pt x="615542" y="824311"/>
                 </a:lnTo>
                 <a:lnTo>
-                  <a:pt x="599636" y="810362"/>
+                  <a:pt x="599636" y="810361"/>
                 </a:lnTo>
                 <a:lnTo>
                   <a:pt x="583852" y="796274"/>
@@ -8539,55 +8543,55 @@
                   <a:pt x="568192" y="782049"/>
                 </a:lnTo>
                 <a:lnTo>
-                  <a:pt x="552657" y="767689"/>
-                </a:lnTo>
-                <a:lnTo>
-                  <a:pt x="537247" y="753193"/>
-                </a:lnTo>
-                <a:lnTo>
-                  <a:pt x="521965" y="738563"/>
-                </a:lnTo>
-                <a:lnTo>
-                  <a:pt x="506811" y="723800"/>
-                </a:lnTo>
-                <a:lnTo>
-                  <a:pt x="491786" y="708906"/>
-                </a:lnTo>
-                <a:lnTo>
-                  <a:pt x="476892" y="693881"/>
+                  <a:pt x="552656" y="767688"/>
+                </a:lnTo>
+                <a:lnTo>
+                  <a:pt x="537247" y="753192"/>
+                </a:lnTo>
+                <a:lnTo>
+                  <a:pt x="521964" y="738563"/>
+                </a:lnTo>
+                <a:lnTo>
+                  <a:pt x="506810" y="723800"/>
+                </a:lnTo>
+                <a:lnTo>
+                  <a:pt x="491785" y="708906"/>
+                </a:lnTo>
+                <a:lnTo>
+                  <a:pt x="476891" y="693881"/>
                 </a:lnTo>
                 <a:lnTo>
                   <a:pt x="462129" y="678727"/>
                 </a:lnTo>
                 <a:lnTo>
-                  <a:pt x="447499" y="663445"/>
+                  <a:pt x="447499" y="663444"/>
                 </a:lnTo>
                 <a:lnTo>
                   <a:pt x="433003" y="648035"/>
                 </a:lnTo>
                 <a:lnTo>
-                  <a:pt x="418643" y="632500"/>
-                </a:lnTo>
-                <a:lnTo>
-                  <a:pt x="404418" y="616840"/>
-                </a:lnTo>
-                <a:lnTo>
-                  <a:pt x="390330" y="601056"/>
-                </a:lnTo>
-                <a:lnTo>
-                  <a:pt x="376381" y="585150"/>
-                </a:lnTo>
-                <a:lnTo>
-                  <a:pt x="362571" y="569123"/>
-                </a:lnTo>
-                <a:lnTo>
-                  <a:pt x="348902" y="552975"/>
-                </a:lnTo>
-                <a:lnTo>
-                  <a:pt x="335374" y="536710"/>
-                </a:lnTo>
-                <a:lnTo>
-                  <a:pt x="321988" y="520327"/>
+                  <a:pt x="418642" y="632499"/>
+                </a:lnTo>
+                <a:lnTo>
+                  <a:pt x="404417" y="616839"/>
+                </a:lnTo>
+                <a:lnTo>
+                  <a:pt x="390330" y="601055"/>
+                </a:lnTo>
+                <a:lnTo>
+                  <a:pt x="376381" y="585149"/>
+                </a:lnTo>
+                <a:lnTo>
+                  <a:pt x="362571" y="569122"/>
+                </a:lnTo>
+                <a:lnTo>
+                  <a:pt x="348901" y="552975"/>
+                </a:lnTo>
+                <a:lnTo>
+                  <a:pt x="335373" y="536709"/>
+                </a:lnTo>
+                <a:lnTo>
+                  <a:pt x="321988" y="520326"/>
                 </a:lnTo>
                 <a:lnTo>
                   <a:pt x="308746" y="503827"/>
@@ -8599,7 +8603,7 @@
                   <a:pt x="282696" y="470485"/>
                 </a:lnTo>
                 <a:lnTo>
-                  <a:pt x="269890" y="453645"/>
+                  <a:pt x="269890" y="453644"/>
                 </a:lnTo>
                 <a:lnTo>
                   <a:pt x="257232" y="436693"/>
@@ -8608,16 +8612,16 @@
                   <a:pt x="244722" y="419632"/>
                 </a:lnTo>
                 <a:lnTo>
-                  <a:pt x="232362" y="402462"/>
-                </a:lnTo>
-                <a:lnTo>
-                  <a:pt x="220152" y="385185"/>
-                </a:lnTo>
-                <a:lnTo>
-                  <a:pt x="208093" y="367802"/>
-                </a:lnTo>
-                <a:lnTo>
-                  <a:pt x="196186" y="350315"/>
+                  <a:pt x="232361" y="402462"/>
+                </a:lnTo>
+                <a:lnTo>
+                  <a:pt x="220151" y="385185"/>
+                </a:lnTo>
+                <a:lnTo>
+                  <a:pt x="208092" y="367802"/>
+                </a:lnTo>
+                <a:lnTo>
+                  <a:pt x="196185" y="350314"/>
                 </a:lnTo>
                 <a:lnTo>
                   <a:pt x="184432" y="332724"/>
@@ -8629,10 +8633,10 @@
                   <a:pt x="161387" y="297238"/>
                 </a:lnTo>
                 <a:lnTo>
-                  <a:pt x="150098" y="279346"/>
-                </a:lnTo>
-                <a:lnTo>
-                  <a:pt x="138965" y="261356"/>
+                  <a:pt x="150098" y="279345"/>
+                </a:lnTo>
+                <a:lnTo>
+                  <a:pt x="138965" y="261355"/>
                 </a:lnTo>
                 <a:lnTo>
                   <a:pt x="127990" y="243269"/>
@@ -8641,13 +8645,13 @@
                   <a:pt x="117173" y="225087"/>
                 </a:lnTo>
                 <a:lnTo>
-                  <a:pt x="106515" y="206812"/>
+                  <a:pt x="106515" y="206811"/>
                 </a:lnTo>
                 <a:lnTo>
                   <a:pt x="96017" y="188444"/>
                 </a:lnTo>
                 <a:lnTo>
-                  <a:pt x="85680" y="169985"/>
+                  <a:pt x="85679" y="169985"/>
                 </a:lnTo>
                 <a:lnTo>
                   <a:pt x="75504" y="151437"/>
@@ -8656,13 +8660,13 @@
                   <a:pt x="65490" y="132801"/>
                 </a:lnTo>
                 <a:lnTo>
-                  <a:pt x="55640" y="114078"/>
-                </a:lnTo>
-                <a:lnTo>
-                  <a:pt x="45953" y="95270"/>
-                </a:lnTo>
-                <a:lnTo>
-                  <a:pt x="36430" y="76378"/>
+                  <a:pt x="55639" y="114078"/>
+                </a:lnTo>
+                <a:lnTo>
+                  <a:pt x="45952" y="95269"/>
+                </a:lnTo>
+                <a:lnTo>
+                  <a:pt x="36430" y="76377"/>
                 </a:lnTo>
                 <a:lnTo>
                   <a:pt x="27073" y="57403"/>
@@ -8671,7 +8675,7 @@
                   <a:pt x="17882" y="38348"/>
                 </a:lnTo>
                 <a:lnTo>
-                  <a:pt x="8858" y="19213"/>
+                  <a:pt x="8857" y="19213"/>
                 </a:lnTo>
                 <a:lnTo>
                   <a:pt x="0" y="0"/>
@@ -9553,35 +9557,35 @@
             <a:gdLst/>
             <a:ahLst/>
             <a:cxnLst/>
-            <a:rect l="l" t="t" r="r" b="b"/>
+            <a:rect l="0" t="0" r="r" b="b"/>
             <a:pathLst>
               <a:path w="1614281" h="1686300">
                 <a:moveTo>
                   <a:pt x="1614281" y="1686300"/>
                 </a:moveTo>
                 <a:lnTo>
-                  <a:pt x="1592026" y="1677646"/>
+                  <a:pt x="1592026" y="1677645"/>
                 </a:lnTo>
                 <a:lnTo>
                   <a:pt x="1569847" y="1668797"/>
                 </a:lnTo>
                 <a:lnTo>
-                  <a:pt x="1547747" y="1659756"/>
-                </a:lnTo>
-                <a:lnTo>
-                  <a:pt x="1525726" y="1650522"/>
+                  <a:pt x="1547747" y="1659755"/>
+                </a:lnTo>
+                <a:lnTo>
+                  <a:pt x="1525726" y="1650521"/>
                 </a:lnTo>
                 <a:lnTo>
                   <a:pt x="1503787" y="1641096"/>
                 </a:lnTo>
                 <a:lnTo>
-                  <a:pt x="1481930" y="1631479"/>
-                </a:lnTo>
-                <a:lnTo>
-                  <a:pt x="1460159" y="1621672"/>
-                </a:lnTo>
-                <a:lnTo>
-                  <a:pt x="1438474" y="1611675"/>
+                  <a:pt x="1481931" y="1631479"/>
+                </a:lnTo>
+                <a:lnTo>
+                  <a:pt x="1460159" y="1621671"/>
+                </a:lnTo>
+                <a:lnTo>
+                  <a:pt x="1438474" y="1611674"/>
                 </a:lnTo>
                 <a:lnTo>
                   <a:pt x="1416877" y="1601489"/>
@@ -9599,22 +9603,22 @@
                   <a:pt x="1331403" y="1558873"/>
                 </a:lnTo>
                 <a:lnTo>
-                  <a:pt x="1310270" y="1547755"/>
-                </a:lnTo>
-                <a:lnTo>
-                  <a:pt x="1289236" y="1536453"/>
-                </a:lnTo>
-                <a:lnTo>
-                  <a:pt x="1268301" y="1524968"/>
+                  <a:pt x="1310271" y="1547754"/>
+                </a:lnTo>
+                <a:lnTo>
+                  <a:pt x="1289237" y="1536452"/>
+                </a:lnTo>
+                <a:lnTo>
+                  <a:pt x="1268302" y="1524967"/>
                 </a:lnTo>
                 <a:lnTo>
                   <a:pt x="1247468" y="1513300"/>
                 </a:lnTo>
                 <a:lnTo>
-                  <a:pt x="1226736" y="1501451"/>
-                </a:lnTo>
-                <a:lnTo>
-                  <a:pt x="1206109" y="1489422"/>
+                  <a:pt x="1226737" y="1501451"/>
+                </a:lnTo>
+                <a:lnTo>
+                  <a:pt x="1206110" y="1489421"/>
                 </a:lnTo>
                 <a:lnTo>
                   <a:pt x="1185588" y="1477213"/>
@@ -9626,22 +9630,22 @@
                   <a:pt x="1144869" y="1452260"/>
                 </a:lnTo>
                 <a:lnTo>
-                  <a:pt x="1124674" y="1439518"/>
-                </a:lnTo>
-                <a:lnTo>
-                  <a:pt x="1104592" y="1426601"/>
-                </a:lnTo>
-                <a:lnTo>
-                  <a:pt x="1084622" y="1413508"/>
-                </a:lnTo>
-                <a:lnTo>
-                  <a:pt x="1064768" y="1400242"/>
+                  <a:pt x="1124675" y="1439518"/>
+                </a:lnTo>
+                <a:lnTo>
+                  <a:pt x="1104592" y="1426600"/>
+                </a:lnTo>
+                <a:lnTo>
+                  <a:pt x="1084623" y="1413508"/>
+                </a:lnTo>
+                <a:lnTo>
+                  <a:pt x="1064769" y="1400242"/>
                 </a:lnTo>
                 <a:lnTo>
                   <a:pt x="1045031" y="1386803"/>
                 </a:lnTo>
                 <a:lnTo>
-                  <a:pt x="1025411" y="1373193"/>
+                  <a:pt x="1025411" y="1373192"/>
                 </a:lnTo>
                 <a:lnTo>
                   <a:pt x="1005911" y="1359411"/>
@@ -9650,76 +9654,76 @@
                   <a:pt x="986532" y="1345460"/>
                 </a:lnTo>
                 <a:lnTo>
-                  <a:pt x="967275" y="1331341"/>
-                </a:lnTo>
-                <a:lnTo>
-                  <a:pt x="948142" y="1317054"/>
-                </a:lnTo>
-                <a:lnTo>
-                  <a:pt x="929135" y="1302600"/>
-                </a:lnTo>
-                <a:lnTo>
-                  <a:pt x="910255" y="1287982"/>
-                </a:lnTo>
-                <a:lnTo>
-                  <a:pt x="891503" y="1273199"/>
-                </a:lnTo>
-                <a:lnTo>
-                  <a:pt x="872880" y="1258253"/>
-                </a:lnTo>
-                <a:lnTo>
-                  <a:pt x="854389" y="1243145"/>
-                </a:lnTo>
-                <a:lnTo>
-                  <a:pt x="836030" y="1227876"/>
-                </a:lnTo>
-                <a:lnTo>
-                  <a:pt x="817805" y="1212447"/>
+                  <a:pt x="967275" y="1331340"/>
+                </a:lnTo>
+                <a:lnTo>
+                  <a:pt x="948143" y="1317053"/>
+                </a:lnTo>
+                <a:lnTo>
+                  <a:pt x="929136" y="1302600"/>
+                </a:lnTo>
+                <a:lnTo>
+                  <a:pt x="910255" y="1287981"/>
+                </a:lnTo>
+                <a:lnTo>
+                  <a:pt x="891503" y="1273198"/>
+                </a:lnTo>
+                <a:lnTo>
+                  <a:pt x="872881" y="1258252"/>
+                </a:lnTo>
+                <a:lnTo>
+                  <a:pt x="854389" y="1243144"/>
+                </a:lnTo>
+                <a:lnTo>
+                  <a:pt x="836031" y="1227875"/>
+                </a:lnTo>
+                <a:lnTo>
+                  <a:pt x="817806" y="1212447"/>
                 </a:lnTo>
                 <a:lnTo>
                   <a:pt x="799716" y="1196860"/>
                 </a:lnTo>
                 <a:lnTo>
-                  <a:pt x="781763" y="1181116"/>
+                  <a:pt x="781764" y="1181116"/>
                 </a:lnTo>
                 <a:lnTo>
                   <a:pt x="763949" y="1165216"/>
                 </a:lnTo>
                 <a:lnTo>
-                  <a:pt x="746273" y="1149161"/>
+                  <a:pt x="746274" y="1149161"/>
                 </a:lnTo>
                 <a:lnTo>
                   <a:pt x="728739" y="1132952"/>
                 </a:lnTo>
                 <a:lnTo>
-                  <a:pt x="711346" y="1116591"/>
+                  <a:pt x="711347" y="1116591"/>
                 </a:lnTo>
                 <a:lnTo>
                   <a:pt x="694098" y="1100079"/>
                 </a:lnTo>
                 <a:lnTo>
-                  <a:pt x="676993" y="1083417"/>
-                </a:lnTo>
-                <a:lnTo>
-                  <a:pt x="660035" y="1066606"/>
-                </a:lnTo>
-                <a:lnTo>
-                  <a:pt x="643224" y="1049648"/>
-                </a:lnTo>
-                <a:lnTo>
-                  <a:pt x="626562" y="1032544"/>
+                  <a:pt x="676994" y="1083416"/>
+                </a:lnTo>
+                <a:lnTo>
+                  <a:pt x="660036" y="1066606"/>
+                </a:lnTo>
+                <a:lnTo>
+                  <a:pt x="643225" y="1049648"/>
+                </a:lnTo>
+                <a:lnTo>
+                  <a:pt x="626563" y="1032543"/>
                 </a:lnTo>
                 <a:lnTo>
                   <a:pt x="610050" y="1015295"/>
                 </a:lnTo>
                 <a:lnTo>
-                  <a:pt x="593689" y="997903"/>
-                </a:lnTo>
-                <a:lnTo>
-                  <a:pt x="577480" y="980368"/>
-                </a:lnTo>
-                <a:lnTo>
-                  <a:pt x="561425" y="962693"/>
+                  <a:pt x="593689" y="997902"/>
+                </a:lnTo>
+                <a:lnTo>
+                  <a:pt x="577481" y="980368"/>
+                </a:lnTo>
+                <a:lnTo>
+                  <a:pt x="561426" y="962692"/>
                 </a:lnTo>
                 <a:lnTo>
                   <a:pt x="545525" y="944878"/>
@@ -9740,10 +9744,10 @@
                   <a:pt x="468389" y="853761"/>
                 </a:lnTo>
                 <a:lnTo>
-                  <a:pt x="453443" y="835139"/>
-                </a:lnTo>
-                <a:lnTo>
-                  <a:pt x="438660" y="816387"/>
+                  <a:pt x="453443" y="835138"/>
+                </a:lnTo>
+                <a:lnTo>
+                  <a:pt x="438660" y="816386"/>
                 </a:lnTo>
                 <a:lnTo>
                   <a:pt x="424041" y="797506"/>
@@ -9752,19 +9756,19 @@
                   <a:pt x="409588" y="778499"/>
                 </a:lnTo>
                 <a:lnTo>
-                  <a:pt x="395300" y="759366"/>
-                </a:lnTo>
-                <a:lnTo>
-                  <a:pt x="381181" y="740110"/>
-                </a:lnTo>
-                <a:lnTo>
-                  <a:pt x="367230" y="720731"/>
+                  <a:pt x="395301" y="759366"/>
+                </a:lnTo>
+                <a:lnTo>
+                  <a:pt x="381181" y="740109"/>
+                </a:lnTo>
+                <a:lnTo>
+                  <a:pt x="367230" y="720730"/>
                 </a:lnTo>
                 <a:lnTo>
                   <a:pt x="353449" y="701230"/>
                 </a:lnTo>
                 <a:lnTo>
-                  <a:pt x="339838" y="681611"/>
+                  <a:pt x="339838" y="681610"/>
                 </a:lnTo>
                 <a:lnTo>
                   <a:pt x="326399" y="661873"/>
@@ -9773,7 +9777,7 @@
                   <a:pt x="313133" y="642019"/>
                 </a:lnTo>
                 <a:lnTo>
-                  <a:pt x="300041" y="622050"/>
+                  <a:pt x="300041" y="622049"/>
                 </a:lnTo>
                 <a:lnTo>
                   <a:pt x="287123" y="601967"/>
@@ -9785,16 +9789,16 @@
                   <a:pt x="261816" y="561467"/>
                 </a:lnTo>
                 <a:lnTo>
-                  <a:pt x="249428" y="541053"/>
+                  <a:pt x="249429" y="541053"/>
                 </a:lnTo>
                 <a:lnTo>
                   <a:pt x="237220" y="520532"/>
                 </a:lnTo>
                 <a:lnTo>
-                  <a:pt x="225190" y="499905"/>
-                </a:lnTo>
-                <a:lnTo>
-                  <a:pt x="213341" y="479174"/>
+                  <a:pt x="225191" y="499905"/>
+                </a:lnTo>
+                <a:lnTo>
+                  <a:pt x="213342" y="479173"/>
                 </a:lnTo>
                 <a:lnTo>
                   <a:pt x="201674" y="458340"/>
@@ -9803,22 +9807,22 @@
                   <a:pt x="190189" y="437405"/>
                 </a:lnTo>
                 <a:lnTo>
-                  <a:pt x="178886" y="416371"/>
-                </a:lnTo>
-                <a:lnTo>
-                  <a:pt x="167768" y="395239"/>
+                  <a:pt x="178887" y="416370"/>
+                </a:lnTo>
+                <a:lnTo>
+                  <a:pt x="167769" y="395238"/>
                 </a:lnTo>
                 <a:lnTo>
                   <a:pt x="156835" y="374010"/>
                 </a:lnTo>
                 <a:lnTo>
-                  <a:pt x="146087" y="352688"/>
-                </a:lnTo>
-                <a:lnTo>
-                  <a:pt x="135526" y="331272"/>
-                </a:lnTo>
-                <a:lnTo>
-                  <a:pt x="125152" y="309764"/>
+                  <a:pt x="146088" y="352687"/>
+                </a:lnTo>
+                <a:lnTo>
+                  <a:pt x="135527" y="331271"/>
+                </a:lnTo>
+                <a:lnTo>
+                  <a:pt x="125153" y="309764"/>
                 </a:lnTo>
                 <a:lnTo>
                   <a:pt x="114967" y="288167"/>
@@ -9827,37 +9831,37 @@
                   <a:pt x="104970" y="266482"/>
                 </a:lnTo>
                 <a:lnTo>
-                  <a:pt x="95162" y="244711"/>
-                </a:lnTo>
-                <a:lnTo>
-                  <a:pt x="85545" y="222855"/>
+                  <a:pt x="95163" y="244710"/>
+                </a:lnTo>
+                <a:lnTo>
+                  <a:pt x="85546" y="222854"/>
                 </a:lnTo>
                 <a:lnTo>
                   <a:pt x="76120" y="200915"/>
                 </a:lnTo>
                 <a:lnTo>
-                  <a:pt x="66885" y="178895"/>
+                  <a:pt x="66886" y="178894"/>
                 </a:lnTo>
                 <a:lnTo>
                   <a:pt x="57844" y="156794"/>
                 </a:lnTo>
                 <a:lnTo>
-                  <a:pt x="48996" y="134616"/>
-                </a:lnTo>
-                <a:lnTo>
-                  <a:pt x="40341" y="112361"/>
-                </a:lnTo>
-                <a:lnTo>
-                  <a:pt x="31881" y="90031"/>
-                </a:lnTo>
-                <a:lnTo>
-                  <a:pt x="23617" y="67629"/>
+                  <a:pt x="48996" y="134615"/>
+                </a:lnTo>
+                <a:lnTo>
+                  <a:pt x="40342" y="112360"/>
+                </a:lnTo>
+                <a:lnTo>
+                  <a:pt x="31882" y="90031"/>
+                </a:lnTo>
+                <a:lnTo>
+                  <a:pt x="23617" y="67628"/>
                 </a:lnTo>
                 <a:lnTo>
                   <a:pt x="15548" y="45155"/>
                 </a:lnTo>
                 <a:lnTo>
-                  <a:pt x="7675" y="22612"/>
+                  <a:pt x="7675" y="22611"/>
                 </a:lnTo>
                 <a:lnTo>
                   <a:pt x="0" y="0"/>
@@ -10411,51 +10415,51 @@
         <p:spPr>
           <a:xfrm>
             <a:off x="5945237" y="1403759"/>
-            <a:ext cx="6200476" cy="5437671"/>
+            <a:ext cx="6200476" cy="5437672"/>
           </a:xfrm>
           <a:custGeom>
             <a:avLst/>
             <a:gdLst/>
             <a:ahLst/>
             <a:cxnLst/>
-            <a:rect l="l" t="t" r="r" b="b"/>
+            <a:rect l="0" t="0" r="r" b="b"/>
             <a:pathLst>
-              <a:path w="6200476" h="5437671">
+              <a:path w="6200476" h="5437672">
                 <a:moveTo>
-                  <a:pt x="0" y="5437671"/>
+                  <a:pt x="0" y="5437672"/>
                 </a:moveTo>
                 <a:lnTo>
                   <a:pt x="7360" y="5383594"/>
                 </a:lnTo>
                 <a:lnTo>
-                  <a:pt x="15191" y="5329582"/>
-                </a:lnTo>
-                <a:lnTo>
-                  <a:pt x="23493" y="5275641"/>
+                  <a:pt x="15191" y="5329583"/>
+                </a:lnTo>
+                <a:lnTo>
+                  <a:pt x="23493" y="5275642"/>
                 </a:lnTo>
                 <a:lnTo>
                   <a:pt x="32266" y="5221775"/>
                 </a:lnTo>
                 <a:lnTo>
-                  <a:pt x="41508" y="5167987"/>
-                </a:lnTo>
-                <a:lnTo>
-                  <a:pt x="51220" y="5114282"/>
+                  <a:pt x="41508" y="5167988"/>
+                </a:lnTo>
+                <a:lnTo>
+                  <a:pt x="51220" y="5114283"/>
                 </a:lnTo>
                 <a:lnTo>
                   <a:pt x="61400" y="5060664"/>
                 </a:lnTo>
                 <a:lnTo>
-                  <a:pt x="72047" y="5007136"/>
+                  <a:pt x="72047" y="5007137"/>
                 </a:lnTo>
                 <a:lnTo>
                   <a:pt x="83161" y="4953704"/>
                 </a:lnTo>
                 <a:lnTo>
-                  <a:pt x="94741" y="4900370"/>
-                </a:lnTo>
-                <a:lnTo>
-                  <a:pt x="106785" y="4847140"/>
+                  <a:pt x="94741" y="4900371"/>
+                </a:lnTo>
+                <a:lnTo>
+                  <a:pt x="106785" y="4847141"/>
                 </a:lnTo>
                 <a:lnTo>
                   <a:pt x="119294" y="4794017"/>
@@ -10467,7 +10471,7 @@
                   <a:pt x="145700" y="4688108"/>
                 </a:lnTo>
                 <a:lnTo>
-                  <a:pt x="159596" y="4635330"/>
+                  <a:pt x="159596" y="4635331"/>
                 </a:lnTo>
                 <a:lnTo>
                   <a:pt x="173951" y="4582676"/>
@@ -10476,16 +10480,16 @@
                   <a:pt x="188765" y="4530149"/>
                 </a:lnTo>
                 <a:lnTo>
-                  <a:pt x="204037" y="4477753"/>
+                  <a:pt x="204037" y="4477754"/>
                 </a:lnTo>
                 <a:lnTo>
                   <a:pt x="219766" y="4425493"/>
                 </a:lnTo>
                 <a:lnTo>
-                  <a:pt x="235950" y="4373371"/>
-                </a:lnTo>
-                <a:lnTo>
-                  <a:pt x="252588" y="4321393"/>
+                  <a:pt x="235950" y="4373372"/>
+                </a:lnTo>
+                <a:lnTo>
+                  <a:pt x="252588" y="4321394"/>
                 </a:lnTo>
                 <a:lnTo>
                   <a:pt x="269679" y="4269563"/>
@@ -10494,10 +10498,10 @@
                   <a:pt x="287222" y="4217883"/>
                 </a:lnTo>
                 <a:lnTo>
-                  <a:pt x="305215" y="4166358"/>
-                </a:lnTo>
-                <a:lnTo>
-                  <a:pt x="323658" y="4114992"/>
+                  <a:pt x="305215" y="4166359"/>
+                </a:lnTo>
+                <a:lnTo>
+                  <a:pt x="323657" y="4114993"/>
                 </a:lnTo>
                 <a:lnTo>
                   <a:pt x="342547" y="4063790"/>
@@ -10506,10 +10510,10 @@
                   <a:pt x="361883" y="4012754"/>
                 </a:lnTo>
                 <a:lnTo>
-                  <a:pt x="381664" y="3961888"/>
-                </a:lnTo>
-                <a:lnTo>
-                  <a:pt x="401887" y="3911197"/>
+                  <a:pt x="381663" y="3961889"/>
+                </a:lnTo>
+                <a:lnTo>
+                  <a:pt x="401887" y="3911198"/>
                 </a:lnTo>
                 <a:lnTo>
                   <a:pt x="422552" y="3860685"/>
@@ -10524,19 +10528,19 @@
                   <a:pt x="487181" y="3710257"/>
                 </a:lnTo>
                 <a:lnTo>
-                  <a:pt x="509597" y="3660496"/>
-                </a:lnTo>
-                <a:lnTo>
-                  <a:pt x="532446" y="3610933"/>
+                  <a:pt x="509597" y="3660497"/>
+                </a:lnTo>
+                <a:lnTo>
+                  <a:pt x="532446" y="3610934"/>
                 </a:lnTo>
                 <a:lnTo>
                   <a:pt x="555726" y="3561572"/>
                 </a:lnTo>
                 <a:lnTo>
-                  <a:pt x="579436" y="3512415"/>
-                </a:lnTo>
-                <a:lnTo>
-                  <a:pt x="603575" y="3463467"/>
+                  <a:pt x="579436" y="3512416"/>
+                </a:lnTo>
+                <a:lnTo>
+                  <a:pt x="603575" y="3463468"/>
                 </a:lnTo>
                 <a:lnTo>
                   <a:pt x="628139" y="3414732"/>
@@ -10548,13 +10552,13 @@
                   <a:pt x="678540" y="3317914"/>
                 </a:lnTo>
                 <a:lnTo>
-                  <a:pt x="704372" y="3269838"/>
+                  <a:pt x="704372" y="3269839"/>
                 </a:lnTo>
                 <a:lnTo>
                   <a:pt x="730622" y="3221990"/>
                 </a:lnTo>
                 <a:lnTo>
-                  <a:pt x="757289" y="3174372"/>
+                  <a:pt x="757289" y="3174373"/>
                 </a:lnTo>
                 <a:lnTo>
                   <a:pt x="784371" y="3126990"/>
@@ -10569,7 +10573,7 @@
                   <a:pt x="868082" y="2986284"/>
                 </a:lnTo>
                 <a:lnTo>
-                  <a:pt x="896801" y="2939875"/>
+                  <a:pt x="896800" y="2939875"/>
                 </a:lnTo>
                 <a:lnTo>
                   <a:pt x="925923" y="2893719"/>
@@ -10581,10 +10585,10 @@
                   <a:pt x="985371" y="2802177"/>
                 </a:lnTo>
                 <a:lnTo>
-                  <a:pt x="1015692" y="2756798"/>
-                </a:lnTo>
-                <a:lnTo>
-                  <a:pt x="1046408" y="2711686"/>
+                  <a:pt x="1015692" y="2756799"/>
+                </a:lnTo>
+                <a:lnTo>
+                  <a:pt x="1046408" y="2711687"/>
                 </a:lnTo>
                 <a:lnTo>
                   <a:pt x="1077516" y="2666844"/>
@@ -10593,13 +10597,13 @@
                   <a:pt x="1109014" y="2622275"/>
                 </a:lnTo>
                 <a:lnTo>
-                  <a:pt x="1140900" y="2577982"/>
+                  <a:pt x="1140900" y="2577983"/>
                 </a:lnTo>
                 <a:lnTo>
                   <a:pt x="1173172" y="2533970"/>
                 </a:lnTo>
                 <a:lnTo>
-                  <a:pt x="1205826" y="2490240"/>
+                  <a:pt x="1205826" y="2490241"/>
                 </a:lnTo>
                 <a:lnTo>
                   <a:pt x="1238860" y="2446798"/>
@@ -10608,10 +10612,10 @@
                   <a:pt x="1272273" y="2403645"/>
                 </a:lnTo>
                 <a:lnTo>
-                  <a:pt x="1306061" y="2360785"/>
-                </a:lnTo>
-                <a:lnTo>
-                  <a:pt x="1340221" y="2318222"/>
+                  <a:pt x="1306061" y="2360786"/>
+                </a:lnTo>
+                <a:lnTo>
+                  <a:pt x="1340221" y="2318223"/>
                 </a:lnTo>
                 <a:lnTo>
                   <a:pt x="1374752" y="2275959"/>
@@ -10620,7 +10624,7 @@
                   <a:pt x="1409650" y="2233999"/>
                 </a:lnTo>
                 <a:lnTo>
-                  <a:pt x="1444913" y="2192344"/>
+                  <a:pt x="1444913" y="2192345"/>
                 </a:lnTo>
                 <a:lnTo>
                   <a:pt x="1480538" y="2151000"/>
@@ -10629,16 +10633,16 @@
                   <a:pt x="1516522" y="2109967"/>
                 </a:lnTo>
                 <a:lnTo>
-                  <a:pt x="1552863" y="2069250"/>
+                  <a:pt x="1552863" y="2069251"/>
                 </a:lnTo>
                 <a:lnTo>
                   <a:pt x="1589559" y="2028852"/>
                 </a:lnTo>
                 <a:lnTo>
-                  <a:pt x="1626605" y="1988775"/>
-                </a:lnTo>
-                <a:lnTo>
-                  <a:pt x="1664000" y="1949024"/>
+                  <a:pt x="1626605" y="1988776"/>
+                </a:lnTo>
+                <a:lnTo>
+                  <a:pt x="1663999" y="1949024"/>
                 </a:lnTo>
                 <a:lnTo>
                   <a:pt x="1701740" y="1909600"/>
@@ -10659,7 +10663,7 @@
                   <a:pt x="1895521" y="1717503"/>
                 </a:lnTo>
                 <a:lnTo>
-                  <a:pt x="1935272" y="1680108"/>
+                  <a:pt x="1935272" y="1680109"/>
                 </a:lnTo>
                 <a:lnTo>
                   <a:pt x="1975349" y="1643062"/>
@@ -10668,7 +10672,7 @@
                   <a:pt x="2015747" y="1606367"/>
                 </a:lnTo>
                 <a:lnTo>
-                  <a:pt x="2056464" y="1570025"/>
+                  <a:pt x="2056464" y="1570026"/>
                 </a:lnTo>
                 <a:lnTo>
                   <a:pt x="2097496" y="1534041"/>
@@ -10683,7 +10687,7 @@
                   <a:pt x="2222456" y="1428255"/>
                 </a:lnTo>
                 <a:lnTo>
-                  <a:pt x="2264719" y="1393724"/>
+                  <a:pt x="2264719" y="1393725"/>
                 </a:lnTo>
                 <a:lnTo>
                   <a:pt x="2307282" y="1359564"/>
@@ -10692,19 +10696,19 @@
                   <a:pt x="2350142" y="1325776"/>
                 </a:lnTo>
                 <a:lnTo>
-                  <a:pt x="2393295" y="1292364"/>
+                  <a:pt x="2393294" y="1292364"/>
                 </a:lnTo>
                 <a:lnTo>
                   <a:pt x="2436737" y="1259329"/>
                 </a:lnTo>
                 <a:lnTo>
-                  <a:pt x="2480467" y="1226675"/>
-                </a:lnTo>
-                <a:lnTo>
-                  <a:pt x="2524479" y="1194403"/>
-                </a:lnTo>
-                <a:lnTo>
-                  <a:pt x="2568772" y="1162517"/>
+                  <a:pt x="2480466" y="1226675"/>
+                </a:lnTo>
+                <a:lnTo>
+                  <a:pt x="2524479" y="1194404"/>
+                </a:lnTo>
+                <a:lnTo>
+                  <a:pt x="2568772" y="1162518"/>
                 </a:lnTo>
                 <a:lnTo>
                   <a:pt x="2613341" y="1131019"/>
@@ -10713,16 +10717,16 @@
                   <a:pt x="2658183" y="1099911"/>
                 </a:lnTo>
                 <a:lnTo>
-                  <a:pt x="2703295" y="1069195"/>
-                </a:lnTo>
-                <a:lnTo>
-                  <a:pt x="2748673" y="1038874"/>
+                  <a:pt x="2703295" y="1069196"/>
+                </a:lnTo>
+                <a:lnTo>
+                  <a:pt x="2748673" y="1038875"/>
                 </a:lnTo>
                 <a:lnTo>
                   <a:pt x="2794315" y="1008951"/>
                 </a:lnTo>
                 <a:lnTo>
-                  <a:pt x="2840215" y="979426"/>
+                  <a:pt x="2840215" y="979427"/>
                 </a:lnTo>
                 <a:lnTo>
                   <a:pt x="2886372" y="950304"/>
@@ -10731,7 +10735,7 @@
                   <a:pt x="2932781" y="921585"/>
                 </a:lnTo>
                 <a:lnTo>
-                  <a:pt x="2979439" y="893272"/>
+                  <a:pt x="2979438" y="893273"/>
                 </a:lnTo>
                 <a:lnTo>
                   <a:pt x="3026342" y="865368"/>
@@ -10740,10 +10744,10 @@
                   <a:pt x="3073486" y="837874"/>
                 </a:lnTo>
                 <a:lnTo>
-                  <a:pt x="3120869" y="810792"/>
-                </a:lnTo>
-                <a:lnTo>
-                  <a:pt x="3168487" y="784125"/>
+                  <a:pt x="3120869" y="810793"/>
+                </a:lnTo>
+                <a:lnTo>
+                  <a:pt x="3168487" y="784126"/>
                 </a:lnTo>
                 <a:lnTo>
                   <a:pt x="3216335" y="757875"/>
@@ -10764,7 +10768,7 @@
                   <a:pt x="3458912" y="632940"/>
                 </a:lnTo>
                 <a:lnTo>
-                  <a:pt x="3508069" y="609229"/>
+                  <a:pt x="3508068" y="609230"/>
                 </a:lnTo>
                 <a:lnTo>
                   <a:pt x="3557430" y="585949"/>
@@ -10776,25 +10780,25 @@
                   <a:pt x="3656753" y="540685"/>
                 </a:lnTo>
                 <a:lnTo>
-                  <a:pt x="3706708" y="518704"/>
+                  <a:pt x="3706708" y="518705"/>
                 </a:lnTo>
                 <a:lnTo>
                   <a:pt x="3756852" y="497161"/>
                 </a:lnTo>
                 <a:lnTo>
-                  <a:pt x="3807182" y="476055"/>
-                </a:lnTo>
-                <a:lnTo>
-                  <a:pt x="3857694" y="455390"/>
+                  <a:pt x="3807182" y="476056"/>
+                </a:lnTo>
+                <a:lnTo>
+                  <a:pt x="3857694" y="455391"/>
                 </a:lnTo>
                 <a:lnTo>
                   <a:pt x="3908385" y="435167"/>
                 </a:lnTo>
                 <a:lnTo>
-                  <a:pt x="3959250" y="415386"/>
-                </a:lnTo>
-                <a:lnTo>
-                  <a:pt x="4010286" y="396050"/>
+                  <a:pt x="3959250" y="415387"/>
+                </a:lnTo>
+                <a:lnTo>
+                  <a:pt x="4010286" y="396051"/>
                 </a:lnTo>
                 <a:lnTo>
                   <a:pt x="4061489" y="377161"/>
@@ -10803,25 +10807,25 @@
                   <a:pt x="4112855" y="358719"/>
                 </a:lnTo>
                 <a:lnTo>
-                  <a:pt x="4164380" y="340725"/>
-                </a:lnTo>
-                <a:lnTo>
-                  <a:pt x="4216059" y="323182"/>
-                </a:lnTo>
-                <a:lnTo>
-                  <a:pt x="4267890" y="306091"/>
+                  <a:pt x="4164380" y="340726"/>
+                </a:lnTo>
+                <a:lnTo>
+                  <a:pt x="4216059" y="323183"/>
+                </a:lnTo>
+                <a:lnTo>
+                  <a:pt x="4267890" y="306092"/>
                 </a:lnTo>
                 <a:lnTo>
                   <a:pt x="4319868" y="289453"/>
                 </a:lnTo>
                 <a:lnTo>
-                  <a:pt x="4371990" y="273269"/>
-                </a:lnTo>
-                <a:lnTo>
-                  <a:pt x="4424250" y="257540"/>
-                </a:lnTo>
-                <a:lnTo>
-                  <a:pt x="4476646" y="242268"/>
+                  <a:pt x="4371989" y="273269"/>
+                </a:lnTo>
+                <a:lnTo>
+                  <a:pt x="4424250" y="257541"/>
+                </a:lnTo>
+                <a:lnTo>
+                  <a:pt x="4476646" y="242269"/>
                 </a:lnTo>
                 <a:lnTo>
                   <a:pt x="4529173" y="227454"/>
@@ -10860,19 +10864,19 @@
                   <a:pt x="5114484" y="95012"/>
                 </a:lnTo>
                 <a:lnTo>
-                  <a:pt x="5168272" y="85769"/>
-                </a:lnTo>
-                <a:lnTo>
-                  <a:pt x="5222138" y="76996"/>
-                </a:lnTo>
-                <a:lnTo>
-                  <a:pt x="5276079" y="68694"/>
+                  <a:pt x="5168272" y="85770"/>
+                </a:lnTo>
+                <a:lnTo>
+                  <a:pt x="5222138" y="76997"/>
+                </a:lnTo>
+                <a:lnTo>
+                  <a:pt x="5276079" y="68695"/>
                 </a:lnTo>
                 <a:lnTo>
                   <a:pt x="5330090" y="60863"/>
                 </a:lnTo>
                 <a:lnTo>
-                  <a:pt x="5384168" y="53503"/>
+                  <a:pt x="5384168" y="53504"/>
                 </a:lnTo>
                 <a:lnTo>
                   <a:pt x="5438308" y="46616"/>
@@ -10899,19 +10903,19 @@
                   <a:pt x="5818680" y="11665"/>
                 </a:lnTo>
                 <a:lnTo>
-                  <a:pt x="5873168" y="8570"/>
+                  <a:pt x="5873168" y="8571"/>
                 </a:lnTo>
                 <a:lnTo>
                   <a:pt x="5927681" y="5952"/>
                 </a:lnTo>
                 <a:lnTo>
-                  <a:pt x="5982216" y="3809"/>
+                  <a:pt x="5982215" y="3810"/>
                 </a:lnTo>
                 <a:lnTo>
                   <a:pt x="6036766" y="2143"/>
                 </a:lnTo>
                 <a:lnTo>
-                  <a:pt x="6091329" y="952"/>
+                  <a:pt x="6091329" y="953"/>
                 </a:lnTo>
                 <a:lnTo>
                   <a:pt x="6145901" y="238"/>
@@ -11267,14 +11271,14 @@
             <a:gdLst/>
             <a:ahLst/>
             <a:cxnLst/>
-            <a:rect l="l" t="t" r="r" b="b"/>
+            <a:rect l="0" t="0" r="r" b="b"/>
             <a:pathLst>
               <a:path w="1403571" h="1428284">
                 <a:moveTo>
                   <a:pt x="1403571" y="1428284"/>
                 </a:moveTo>
                 <a:lnTo>
-                  <a:pt x="1385083" y="1421828"/>
+                  <a:pt x="1385084" y="1421828"/>
                 </a:lnTo>
                 <a:lnTo>
                   <a:pt x="1366653" y="1415211"/>
@@ -11286,10 +11290,10 @@
                   <a:pt x="1329969" y="1401495"/>
                 </a:lnTo>
                 <a:lnTo>
-                  <a:pt x="1311718" y="1394398"/>
-                </a:lnTo>
-                <a:lnTo>
-                  <a:pt x="1293530" y="1387142"/>
+                  <a:pt x="1311719" y="1394398"/>
+                </a:lnTo>
+                <a:lnTo>
+                  <a:pt x="1293531" y="1387142"/>
                 </a:lnTo>
                 <a:lnTo>
                   <a:pt x="1275406" y="1379727"/>
@@ -11328,7 +11332,7 @@
                   <a:pt x="1080657" y="1287877"/>
                 </a:lnTo>
                 <a:lnTo>
-                  <a:pt x="1063407" y="1278609"/>
+                  <a:pt x="1063408" y="1278609"/>
                 </a:lnTo>
                 <a:lnTo>
                   <a:pt x="1046239" y="1269190"/>
@@ -11355,7 +11359,7 @@
                   <a:pt x="928454" y="1199115"/>
                 </a:lnTo>
                 <a:lnTo>
-                  <a:pt x="911984" y="1188521"/>
+                  <a:pt x="911985" y="1188521"/>
                 </a:lnTo>
                 <a:lnTo>
                   <a:pt x="895608" y="1177785"/>
@@ -11370,7 +11374,7 @@
                   <a:pt x="847050" y="1144723"/>
                 </a:lnTo>
                 <a:lnTo>
-                  <a:pt x="831058" y="1133421"/>
+                  <a:pt x="831059" y="1133421"/>
                 </a:lnTo>
                 <a:lnTo>
                   <a:pt x="815166" y="1121980"/>
@@ -11403,7 +11407,7 @@
                   <a:pt x="676797" y="1012899"/>
                 </a:lnTo>
                 <a:lnTo>
-                  <a:pt x="661962" y="1000116"/>
+                  <a:pt x="661963" y="1000116"/>
                 </a:lnTo>
                 <a:lnTo>
                   <a:pt x="647240" y="987205"/>
@@ -11418,7 +11422,7 @@
                   <a:pt x="603756" y="947707"/>
                 </a:lnTo>
                 <a:lnTo>
-                  <a:pt x="589492" y="934289"/>
+                  <a:pt x="589493" y="934289"/>
                 </a:lnTo>
                 <a:lnTo>
                   <a:pt x="575347" y="920748"/>
@@ -11445,13 +11449,13 @@
                   <a:pt x="479712" y="822576"/>
                 </a:lnTo>
                 <a:lnTo>
-                  <a:pt x="466545" y="808081"/>
+                  <a:pt x="466546" y="808081"/>
                 </a:lnTo>
                 <a:lnTo>
                   <a:pt x="453506" y="793471"/>
                 </a:lnTo>
                 <a:lnTo>
-                  <a:pt x="440594" y="778748"/>
+                  <a:pt x="440595" y="778748"/>
                 </a:lnTo>
                 <a:lnTo>
                   <a:pt x="427812" y="763914"/>
@@ -11472,10 +11476,10 @@
                   <a:pt x="365868" y="688098"/>
                 </a:lnTo>
                 <a:lnTo>
-                  <a:pt x="353879" y="672615"/>
-                </a:lnTo>
-                <a:lnTo>
-                  <a:pt x="342026" y="657027"/>
+                  <a:pt x="353880" y="672615"/>
+                </a:lnTo>
+                <a:lnTo>
+                  <a:pt x="342027" y="657027"/>
                 </a:lnTo>
                 <a:lnTo>
                   <a:pt x="330310" y="641337"/>
@@ -11490,16 +11494,16 @@
                   <a:pt x="295988" y="593661"/>
                 </a:lnTo>
                 <a:lnTo>
-                  <a:pt x="284826" y="577571"/>
-                </a:lnTo>
-                <a:lnTo>
-                  <a:pt x="273805" y="561385"/>
+                  <a:pt x="284827" y="577571"/>
+                </a:lnTo>
+                <a:lnTo>
+                  <a:pt x="273806" y="561385"/>
                 </a:lnTo>
                 <a:lnTo>
                   <a:pt x="262926" y="545103"/>
                 </a:lnTo>
                 <a:lnTo>
-                  <a:pt x="252189" y="528726"/>
+                  <a:pt x="252190" y="528726"/>
                 </a:lnTo>
                 <a:lnTo>
                   <a:pt x="241596" y="512257"/>
@@ -11511,7 +11515,7 @@
                   <a:pt x="220842" y="479044"/>
                 </a:lnTo>
                 <a:lnTo>
-                  <a:pt x="210683" y="462303"/>
+                  <a:pt x="210684" y="462303"/>
                 </a:lnTo>
                 <a:lnTo>
                   <a:pt x="200671" y="445474"/>
@@ -11544,7 +11548,7 @@
                   <a:pt x="117275" y="290266"/>
                 </a:lnTo>
                 <a:lnTo>
-                  <a:pt x="108767" y="272628"/>
+                  <a:pt x="108768" y="272628"/>
                 </a:lnTo>
                 <a:lnTo>
                   <a:pt x="100414" y="254917"/>
@@ -11556,7 +11560,7 @@
                   <a:pt x="84173" y="219279"/>
                 </a:lnTo>
                 <a:lnTo>
-                  <a:pt x="76286" y="201355"/>
+                  <a:pt x="76287" y="201355"/>
                 </a:lnTo>
                 <a:lnTo>
                   <a:pt x="68557" y="183363"/>
@@ -11571,7 +11575,7 @@
                   <a:pt x="46313" y="128992"/>
                 </a:lnTo>
                 <a:lnTo>
-                  <a:pt x="39215" y="110742"/>
+                  <a:pt x="39216" y="110742"/>
                 </a:lnTo>
                 <a:lnTo>
                   <a:pt x="32278" y="92430"/>
@@ -12724,6 +12728,7 @@
         </p:nvPicPr>
         <p:blipFill>
           <a:blip r:embed="rId2"/>
+          <a:srcRect/>
           <a:stretch>
             <a:fillRect/>
           </a:stretch>
@@ -12754,38 +12759,38 @@
             <a:gdLst/>
             <a:ahLst/>
             <a:cxnLst/>
-            <a:rect l="l" t="t" r="r" b="b"/>
+            <a:rect l="0" t="0" r="r" b="b"/>
             <a:pathLst>
               <a:path w="950957" h="1123316">
                 <a:moveTo>
                   <a:pt x="950957" y="1123316"/>
                 </a:moveTo>
                 <a:lnTo>
-                  <a:pt x="935948" y="1115419"/>
+                  <a:pt x="935948" y="1115420"/>
                 </a:lnTo>
                 <a:lnTo>
                   <a:pt x="921008" y="1107392"/>
                 </a:lnTo>
                 <a:lnTo>
-                  <a:pt x="906139" y="1099234"/>
-                </a:lnTo>
-                <a:lnTo>
-                  <a:pt x="891341" y="1090947"/>
-                </a:lnTo>
-                <a:lnTo>
-                  <a:pt x="876617" y="1082531"/>
+                  <a:pt x="906139" y="1099235"/>
+                </a:lnTo>
+                <a:lnTo>
+                  <a:pt x="891342" y="1090948"/>
+                </a:lnTo>
+                <a:lnTo>
+                  <a:pt x="876617" y="1082532"/>
                 </a:lnTo>
                 <a:lnTo>
                   <a:pt x="861966" y="1073988"/>
                 </a:lnTo>
                 <a:lnTo>
-                  <a:pt x="847390" y="1065316"/>
-                </a:lnTo>
-                <a:lnTo>
-                  <a:pt x="832891" y="1056518"/>
-                </a:lnTo>
-                <a:lnTo>
-                  <a:pt x="818469" y="1047593"/>
+                  <a:pt x="847391" y="1065316"/>
+                </a:lnTo>
+                <a:lnTo>
+                  <a:pt x="832892" y="1056518"/>
+                </a:lnTo>
+                <a:lnTo>
+                  <a:pt x="818470" y="1047593"/>
                 </a:lnTo>
                 <a:lnTo>
                   <a:pt x="804126" y="1038543"/>
@@ -12794,19 +12799,19 @@
                   <a:pt x="789862" y="1029368"/>
                 </a:lnTo>
                 <a:lnTo>
-                  <a:pt x="775678" y="1020069"/>
+                  <a:pt x="775679" y="1020069"/>
                 </a:lnTo>
                 <a:lnTo>
                   <a:pt x="761577" y="1010647"/>
                 </a:lnTo>
                 <a:lnTo>
-                  <a:pt x="747558" y="1001101"/>
-                </a:lnTo>
-                <a:lnTo>
-                  <a:pt x="733623" y="991434"/>
-                </a:lnTo>
-                <a:lnTo>
-                  <a:pt x="719772" y="981646"/>
+                  <a:pt x="747558" y="1001102"/>
+                </a:lnTo>
+                <a:lnTo>
+                  <a:pt x="733623" y="991435"/>
+                </a:lnTo>
+                <a:lnTo>
+                  <a:pt x="719773" y="981646"/>
                 </a:lnTo>
                 <a:lnTo>
                   <a:pt x="706008" y="971737"/>
@@ -12821,7 +12826,7 @@
                   <a:pt x="665242" y="941295"/>
                 </a:lnTo>
                 <a:lnTo>
-                  <a:pt x="651831" y="930912"/>
+                  <a:pt x="651832" y="930912"/>
                 </a:lnTo>
                 <a:lnTo>
                   <a:pt x="638513" y="920412"/>
@@ -12851,10 +12856,10 @@
                   <a:pt x="535362" y="832313"/>
                 </a:lnTo>
                 <a:lnTo>
-                  <a:pt x="522907" y="820800"/>
-                </a:lnTo>
-                <a:lnTo>
-                  <a:pt x="510554" y="809180"/>
+                  <a:pt x="522908" y="820801"/>
+                </a:lnTo>
+                <a:lnTo>
+                  <a:pt x="510555" y="809180"/>
                 </a:lnTo>
                 <a:lnTo>
                   <a:pt x="498303" y="797452"/>
@@ -12866,13 +12871,13 @@
                   <a:pt x="474110" y="773677"/>
                 </a:lnTo>
                 <a:lnTo>
-                  <a:pt x="462170" y="761632"/>
-                </a:lnTo>
-                <a:lnTo>
-                  <a:pt x="450335" y="749484"/>
-                </a:lnTo>
-                <a:lnTo>
-                  <a:pt x="438607" y="737233"/>
+                  <a:pt x="462170" y="761633"/>
+                </a:lnTo>
+                <a:lnTo>
+                  <a:pt x="450336" y="749484"/>
+                </a:lnTo>
+                <a:lnTo>
+                  <a:pt x="438608" y="737233"/>
                 </a:lnTo>
                 <a:lnTo>
                   <a:pt x="426987" y="724880"/>
@@ -12881,16 +12886,16 @@
                   <a:pt x="415474" y="712426"/>
                 </a:lnTo>
                 <a:lnTo>
-                  <a:pt x="404071" y="699871"/>
-                </a:lnTo>
-                <a:lnTo>
-                  <a:pt x="392777" y="687218"/>
+                  <a:pt x="404071" y="699872"/>
+                </a:lnTo>
+                <a:lnTo>
+                  <a:pt x="392778" y="687219"/>
                 </a:lnTo>
                 <a:lnTo>
                   <a:pt x="381595" y="674467"/>
                 </a:lnTo>
                 <a:lnTo>
-                  <a:pt x="370524" y="661619"/>
+                  <a:pt x="370525" y="661619"/>
                 </a:lnTo>
                 <a:lnTo>
                   <a:pt x="359566" y="648675"/>
@@ -12899,7 +12904,7 @@
                   <a:pt x="348721" y="635635"/>
                 </a:lnTo>
                 <a:lnTo>
-                  <a:pt x="337990" y="622501"/>
+                  <a:pt x="337991" y="622502"/>
                 </a:lnTo>
                 <a:lnTo>
                   <a:pt x="327375" y="609275"/>
@@ -12908,10 +12913,10 @@
                   <a:pt x="316875" y="595956"/>
                 </a:lnTo>
                 <a:lnTo>
-                  <a:pt x="306492" y="582545"/>
-                </a:lnTo>
-                <a:lnTo>
-                  <a:pt x="296226" y="569045"/>
+                  <a:pt x="306492" y="582546"/>
+                </a:lnTo>
+                <a:lnTo>
+                  <a:pt x="296226" y="569046"/>
                 </a:lnTo>
                 <a:lnTo>
                   <a:pt x="286079" y="555456"/>
@@ -12923,13 +12928,13 @@
                   <a:pt x="266141" y="528015"/>
                 </a:lnTo>
                 <a:lnTo>
-                  <a:pt x="256353" y="514164"/>
+                  <a:pt x="256353" y="514165"/>
                 </a:lnTo>
                 <a:lnTo>
                   <a:pt x="246686" y="500229"/>
                 </a:lnTo>
                 <a:lnTo>
-                  <a:pt x="237140" y="486210"/>
+                  <a:pt x="237141" y="486211"/>
                 </a:lnTo>
                 <a:lnTo>
                   <a:pt x="227718" y="472109"/>
@@ -12944,7 +12949,7 @@
                   <a:pt x="200194" y="429318"/>
                 </a:lnTo>
                 <a:lnTo>
-                  <a:pt x="191269" y="414896"/>
+                  <a:pt x="191270" y="414896"/>
                 </a:lnTo>
                 <a:lnTo>
                   <a:pt x="182471" y="400397"/>
@@ -12953,13 +12958,13 @@
                   <a:pt x="173800" y="385821"/>
                 </a:lnTo>
                 <a:lnTo>
-                  <a:pt x="165256" y="371170"/>
+                  <a:pt x="165256" y="371171"/>
                 </a:lnTo>
                 <a:lnTo>
                   <a:pt x="156840" y="356446"/>
                 </a:lnTo>
                 <a:lnTo>
-                  <a:pt x="148553" y="341648"/>
+                  <a:pt x="148553" y="341649"/>
                 </a:lnTo>
                 <a:lnTo>
                   <a:pt x="140395" y="326779"/>
@@ -12971,25 +12976,25 @@
                   <a:pt x="124471" y="296830"/>
                 </a:lnTo>
                 <a:lnTo>
-                  <a:pt x="116705" y="281752"/>
+                  <a:pt x="116706" y="281752"/>
                 </a:lnTo>
                 <a:lnTo>
                   <a:pt x="109072" y="266607"/>
                 </a:lnTo>
                 <a:lnTo>
-                  <a:pt x="101571" y="251396"/>
-                </a:lnTo>
-                <a:lnTo>
-                  <a:pt x="94202" y="236120"/>
+                  <a:pt x="101571" y="251397"/>
+                </a:lnTo>
+                <a:lnTo>
+                  <a:pt x="94203" y="236121"/>
                 </a:lnTo>
                 <a:lnTo>
                   <a:pt x="86968" y="220781"/>
                 </a:lnTo>
                 <a:lnTo>
-                  <a:pt x="79867" y="205379"/>
-                </a:lnTo>
-                <a:lnTo>
-                  <a:pt x="72902" y="189915"/>
+                  <a:pt x="79868" y="205379"/>
+                </a:lnTo>
+                <a:lnTo>
+                  <a:pt x="72902" y="189916"/>
                 </a:lnTo>
                 <a:lnTo>
                   <a:pt x="66071" y="174392"/>
@@ -13010,7 +13015,7 @@
                   <a:pt x="33964" y="95912"/>
                 </a:lnTo>
                 <a:lnTo>
-                  <a:pt x="27955" y="80052"/>
+                  <a:pt x="27956" y="80052"/>
                 </a:lnTo>
                 <a:lnTo>
                   <a:pt x="22085" y="64141"/>
@@ -13543,6 +13548,7 @@
         </p:nvPicPr>
         <p:blipFill>
           <a:blip r:embed="rId2"/>
+          <a:srcRect/>
           <a:stretch>
             <a:fillRect/>
           </a:stretch>
@@ -13952,7 +13958,7 @@
             <a:gdLst/>
             <a:ahLst/>
             <a:cxnLst/>
-            <a:rect l="l" t="t" r="r" b="b"/>
+            <a:rect l="0" t="0" r="r" b="b"/>
             <a:pathLst>
               <a:path w="584106" h="714910">
                 <a:moveTo>
@@ -13965,13 +13971,13 @@
                   <a:pt x="564856" y="703796"/>
                 </a:lnTo>
                 <a:lnTo>
-                  <a:pt x="555304" y="698113"/>
+                  <a:pt x="555305" y="698114"/>
                 </a:lnTo>
                 <a:lnTo>
                   <a:pt x="545803" y="692348"/>
                 </a:lnTo>
                 <a:lnTo>
-                  <a:pt x="536352" y="686499"/>
+                  <a:pt x="536352" y="686500"/>
                 </a:lnTo>
                 <a:lnTo>
                   <a:pt x="526953" y="680569"/>
@@ -13980,7 +13986,7 @@
                   <a:pt x="517605" y="674556"/>
                 </a:lnTo>
                 <a:lnTo>
-                  <a:pt x="508311" y="668462"/>
+                  <a:pt x="508311" y="668463"/>
                 </a:lnTo>
                 <a:lnTo>
                   <a:pt x="499070" y="662288"/>
@@ -13992,7 +13998,7 @@
                   <a:pt x="480751" y="649698"/>
                 </a:lnTo>
                 <a:lnTo>
-                  <a:pt x="471675" y="643283"/>
+                  <a:pt x="471675" y="643284"/>
                 </a:lnTo>
                 <a:lnTo>
                   <a:pt x="462655" y="636790"/>
@@ -14001,16 +14007,16 @@
                   <a:pt x="453692" y="630218"/>
                 </a:lnTo>
                 <a:lnTo>
-                  <a:pt x="444787" y="623568"/>
+                  <a:pt x="444787" y="623569"/>
                 </a:lnTo>
                 <a:lnTo>
                   <a:pt x="435940" y="616841"/>
                 </a:lnTo>
                 <a:lnTo>
-                  <a:pt x="427152" y="610037"/>
-                </a:lnTo>
-                <a:lnTo>
-                  <a:pt x="418424" y="603156"/>
+                  <a:pt x="427153" y="610037"/>
+                </a:lnTo>
+                <a:lnTo>
+                  <a:pt x="418425" y="603156"/>
                 </a:lnTo>
                 <a:lnTo>
                   <a:pt x="409757" y="596200"/>
@@ -14031,16 +14037,16 @@
                   <a:pt x="367347" y="560297"/>
                 </a:lnTo>
                 <a:lnTo>
-                  <a:pt x="359055" y="552896"/>
-                </a:lnTo>
-                <a:lnTo>
-                  <a:pt x="350828" y="545424"/>
+                  <a:pt x="359055" y="552897"/>
+                </a:lnTo>
+                <a:lnTo>
+                  <a:pt x="350829" y="545424"/>
                 </a:lnTo>
                 <a:lnTo>
                   <a:pt x="342667" y="537880"/>
                 </a:lnTo>
                 <a:lnTo>
-                  <a:pt x="334572" y="530264"/>
+                  <a:pt x="334572" y="530265"/>
                 </a:lnTo>
                 <a:lnTo>
                   <a:pt x="326544" y="522579"/>
@@ -14049,7 +14055,7 @@
                   <a:pt x="318583" y="514824"/>
                 </a:lnTo>
                 <a:lnTo>
-                  <a:pt x="310689" y="506999"/>
+                  <a:pt x="310690" y="506999"/>
                 </a:lnTo>
                 <a:lnTo>
                   <a:pt x="302865" y="499106"/>
@@ -14064,22 +14070,22 @@
                   <a:pt x="279809" y="475022"/>
                 </a:lnTo>
                 <a:lnTo>
-                  <a:pt x="272265" y="466860"/>
-                </a:lnTo>
-                <a:lnTo>
-                  <a:pt x="264792" y="458633"/>
-                </a:lnTo>
-                <a:lnTo>
-                  <a:pt x="257391" y="450342"/>
-                </a:lnTo>
-                <a:lnTo>
-                  <a:pt x="250063" y="441986"/>
+                  <a:pt x="272265" y="466861"/>
+                </a:lnTo>
+                <a:lnTo>
+                  <a:pt x="264792" y="458634"/>
+                </a:lnTo>
+                <a:lnTo>
+                  <a:pt x="257392" y="450342"/>
+                </a:lnTo>
+                <a:lnTo>
+                  <a:pt x="250064" y="441986"/>
                 </a:lnTo>
                 <a:lnTo>
                   <a:pt x="242809" y="433566"/>
                 </a:lnTo>
                 <a:lnTo>
-                  <a:pt x="235628" y="425083"/>
+                  <a:pt x="235628" y="425084"/>
                 </a:lnTo>
                 <a:lnTo>
                   <a:pt x="228521" y="416539"/>
@@ -14088,19 +14094,19 @@
                   <a:pt x="221489" y="407932"/>
                 </a:lnTo>
                 <a:lnTo>
-                  <a:pt x="214532" y="399264"/>
+                  <a:pt x="214533" y="399264"/>
                 </a:lnTo>
                 <a:lnTo>
                   <a:pt x="207652" y="390536"/>
                 </a:lnTo>
                 <a:lnTo>
-                  <a:pt x="200848" y="381748"/>
+                  <a:pt x="200848" y="381749"/>
                 </a:lnTo>
                 <a:lnTo>
                   <a:pt x="194120" y="372902"/>
                 </a:lnTo>
                 <a:lnTo>
-                  <a:pt x="187470" y="363996"/>
+                  <a:pt x="187471" y="363997"/>
                 </a:lnTo>
                 <a:lnTo>
                   <a:pt x="180899" y="355034"/>
@@ -14109,7 +14115,7 @@
                   <a:pt x="174405" y="346014"/>
                 </a:lnTo>
                 <a:lnTo>
-                  <a:pt x="167991" y="336937"/>
+                  <a:pt x="167991" y="336938"/>
                 </a:lnTo>
                 <a:lnTo>
                   <a:pt x="161656" y="327806"/>
@@ -14121,13 +14127,13 @@
                   <a:pt x="149226" y="309378"/>
                 </a:lnTo>
                 <a:lnTo>
-                  <a:pt x="143132" y="300083"/>
+                  <a:pt x="143133" y="300084"/>
                 </a:lnTo>
                 <a:lnTo>
                   <a:pt x="137120" y="290736"/>
                 </a:lnTo>
                 <a:lnTo>
-                  <a:pt x="131189" y="281337"/>
+                  <a:pt x="131190" y="281337"/>
                 </a:lnTo>
                 <a:lnTo>
                   <a:pt x="125341" y="271886"/>
@@ -14157,7 +14163,7 @@
                   <a:pt x="81567" y="194516"/>
                 </a:lnTo>
                 <a:lnTo>
-                  <a:pt x="76478" y="184635"/>
+                  <a:pt x="76479" y="184635"/>
                 </a:lnTo>
                 <a:lnTo>
                   <a:pt x="71476" y="174711"/>
@@ -14166,7 +14172,7 @@
                   <a:pt x="66560" y="164743"/>
                 </a:lnTo>
                 <a:lnTo>
-                  <a:pt x="61732" y="154732"/>
+                  <a:pt x="61732" y="154733"/>
                 </a:lnTo>
                 <a:lnTo>
                   <a:pt x="56991" y="144680"/>
@@ -14181,13 +14187,13 @@
                   <a:pt x="43297" y="114281"/>
                 </a:lnTo>
                 <a:lnTo>
-                  <a:pt x="38910" y="104069"/>
+                  <a:pt x="38910" y="104070"/>
                 </a:lnTo>
                 <a:lnTo>
                   <a:pt x="34612" y="93820"/>
                 </a:lnTo>
                 <a:lnTo>
-                  <a:pt x="30404" y="83533"/>
+                  <a:pt x="30404" y="83534"/>
                 </a:lnTo>
                 <a:lnTo>
                   <a:pt x="26285" y="73211"/>
@@ -14196,7 +14202,7 @@
                   <a:pt x="22257" y="62852"/>
                 </a:lnTo>
                 <a:lnTo>
-                  <a:pt x="18319" y="52459"/>
+                  <a:pt x="18320" y="52459"/>
                 </a:lnTo>
                 <a:lnTo>
                   <a:pt x="14473" y="42032"/>
@@ -14208,7 +14214,7 @@
                   <a:pt x="7053" y="21079"/>
                 </a:lnTo>
                 <a:lnTo>
-                  <a:pt x="3480" y="10555"/>
+                  <a:pt x="3481" y="10555"/>
                 </a:lnTo>
                 <a:lnTo>
                   <a:pt x="0" y="0"/>
